--- a/13.class_and_objects_4_and_6_mar/OOP_Python_PPTX_Part2.pptx
+++ b/13.class_and_objects_4_and_6_mar/OOP_Python_PPTX_Part2.pptx
@@ -119,13 +119,7 @@
               <a:rPr b="0" lang="en-IN" sz="2000" spc="-1" strike="noStrike">
                 <a:latin typeface="Arial"/>
               </a:rPr>
-              <a:t>Click to edit the notes </a:t>
-            </a:r>
-            <a:r>
-              <a:rPr b="0" lang="en-IN" sz="2000" spc="-1" strike="noStrike">
-                <a:latin typeface="Arial"/>
-              </a:rPr>
-              <a:t>format</a:t>
+              <a:t>Click to edit the notes format</a:t>
             </a:r>
             <a:endParaRPr b="0" lang="en-IN" sz="2000" spc="-1" strike="noStrike">
               <a:latin typeface="Arial"/>
@@ -310,7 +304,7 @@
             <a:pPr algn="r">
               <a:buNone/>
             </a:pPr>
-            <a:fld id="{54F84539-1EDB-4B27-A833-0BE8582AC2F1}" type="slidenum">
+            <a:fld id="{FEE29BC8-7BA1-48F6-8B4E-B47893020AAF}" type="slidenum">
               <a:rPr b="0" lang="en-IN" sz="1400" spc="-1" strike="noStrike">
                 <a:latin typeface="Times New Roman"/>
               </a:rPr>
@@ -358,7 +352,7 @@
         <p:spPr>
           <a:xfrm>
             <a:off x="685800" y="1143000"/>
-            <a:ext cx="5484960" cy="3084840"/>
+            <a:ext cx="5484600" cy="3084480"/>
           </a:xfrm>
           <a:prstGeom prst="rect">
             <a:avLst/>
@@ -381,7 +375,7 @@
         <p:spPr>
           <a:xfrm>
             <a:off x="685800" y="4400640"/>
-            <a:ext cx="5484960" cy="3598920"/>
+            <a:ext cx="5484600" cy="3598560"/>
           </a:xfrm>
           <a:prstGeom prst="rect">
             <a:avLst/>
@@ -415,7 +409,7 @@
         <p:spPr>
           <a:xfrm>
             <a:off x="3884760" y="8685360"/>
-            <a:ext cx="2970360" cy="457200"/>
+            <a:ext cx="2970000" cy="456840"/>
           </a:xfrm>
           <a:prstGeom prst="rect">
             <a:avLst/>
@@ -451,7 +445,7 @@
               </a:lnSpc>
               <a:buNone/>
             </a:pPr>
-            <a:fld id="{50FE304E-7964-456D-B278-9949CD834B1D}" type="slidenum">
+            <a:fld id="{EF9E47F2-321D-4008-91D0-15CCD0AF99FF}" type="slidenum">
               <a:rPr b="0" lang="en-US" sz="1200" spc="-1" strike="noStrike">
                 <a:solidFill>
                   <a:srgbClr val="000000"/>
@@ -502,7 +496,7 @@
         <p:spPr>
           <a:xfrm>
             <a:off x="685800" y="1143000"/>
-            <a:ext cx="5484960" cy="3084840"/>
+            <a:ext cx="5484600" cy="3084480"/>
           </a:xfrm>
           <a:prstGeom prst="rect">
             <a:avLst/>
@@ -525,7 +519,7 @@
         <p:spPr>
           <a:xfrm>
             <a:off x="685800" y="4400640"/>
-            <a:ext cx="5484960" cy="3598920"/>
+            <a:ext cx="5484600" cy="3598560"/>
           </a:xfrm>
           <a:prstGeom prst="rect">
             <a:avLst/>
@@ -559,7 +553,7 @@
         <p:spPr>
           <a:xfrm>
             <a:off x="3884760" y="8685360"/>
-            <a:ext cx="2970360" cy="457200"/>
+            <a:ext cx="2970000" cy="456840"/>
           </a:xfrm>
           <a:prstGeom prst="rect">
             <a:avLst/>
@@ -595,7 +589,7 @@
               </a:lnSpc>
               <a:buNone/>
             </a:pPr>
-            <a:fld id="{CC51B195-DF20-41A7-89C7-C57B9E146B5F}" type="slidenum">
+            <a:fld id="{435B535E-FA37-4A5C-A1C9-B737030A6F08}" type="slidenum">
               <a:rPr b="0" lang="en-US" sz="1200" spc="-1" strike="noStrike">
                 <a:solidFill>
                   <a:srgbClr val="000000"/>
@@ -646,7 +640,7 @@
         <p:spPr>
           <a:xfrm>
             <a:off x="685800" y="1143000"/>
-            <a:ext cx="5484960" cy="3084840"/>
+            <a:ext cx="5484600" cy="3084480"/>
           </a:xfrm>
           <a:prstGeom prst="rect">
             <a:avLst/>
@@ -669,7 +663,7 @@
         <p:spPr>
           <a:xfrm>
             <a:off x="685800" y="4400640"/>
-            <a:ext cx="5484960" cy="3598920"/>
+            <a:ext cx="5484600" cy="3598560"/>
           </a:xfrm>
           <a:prstGeom prst="rect">
             <a:avLst/>
@@ -703,7 +697,7 @@
         <p:spPr>
           <a:xfrm>
             <a:off x="3884760" y="8685360"/>
-            <a:ext cx="2970360" cy="457200"/>
+            <a:ext cx="2970000" cy="456840"/>
           </a:xfrm>
           <a:prstGeom prst="rect">
             <a:avLst/>
@@ -739,7 +733,7 @@
               </a:lnSpc>
               <a:buNone/>
             </a:pPr>
-            <a:fld id="{9A8CEA9F-5422-411E-808E-638FA72815BE}" type="slidenum">
+            <a:fld id="{17152A13-1FD0-4C92-8E95-B6F3C6BBA214}" type="slidenum">
               <a:rPr b="0" lang="en-US" sz="1200" spc="-1" strike="noStrike">
                 <a:solidFill>
                   <a:srgbClr val="000000"/>
@@ -790,7 +784,7 @@
         <p:spPr>
           <a:xfrm>
             <a:off x="685800" y="1143000"/>
-            <a:ext cx="5484960" cy="3084840"/>
+            <a:ext cx="5484600" cy="3084480"/>
           </a:xfrm>
           <a:prstGeom prst="rect">
             <a:avLst/>
@@ -813,7 +807,7 @@
         <p:spPr>
           <a:xfrm>
             <a:off x="685800" y="4400640"/>
-            <a:ext cx="5484960" cy="3598920"/>
+            <a:ext cx="5484600" cy="3598560"/>
           </a:xfrm>
           <a:prstGeom prst="rect">
             <a:avLst/>
@@ -847,7 +841,7 @@
         <p:spPr>
           <a:xfrm>
             <a:off x="3884760" y="8685360"/>
-            <a:ext cx="2970360" cy="457200"/>
+            <a:ext cx="2970000" cy="456840"/>
           </a:xfrm>
           <a:prstGeom prst="rect">
             <a:avLst/>
@@ -883,7 +877,7 @@
               </a:lnSpc>
               <a:buNone/>
             </a:pPr>
-            <a:fld id="{1B4616D8-CE73-4FD0-80DD-70A08CDC5977}" type="slidenum">
+            <a:fld id="{1D44F3D3-DD0F-4987-94ED-1E04B45D451E}" type="slidenum">
               <a:rPr b="0" lang="en-US" sz="1200" spc="-1" strike="noStrike">
                 <a:solidFill>
                   <a:srgbClr val="000000"/>
@@ -934,7 +928,7 @@
         <p:spPr>
           <a:xfrm>
             <a:off x="685800" y="1143000"/>
-            <a:ext cx="5484960" cy="3084840"/>
+            <a:ext cx="5484600" cy="3084480"/>
           </a:xfrm>
           <a:prstGeom prst="rect">
             <a:avLst/>
@@ -957,7 +951,7 @@
         <p:spPr>
           <a:xfrm>
             <a:off x="685800" y="4400640"/>
-            <a:ext cx="5484960" cy="3598920"/>
+            <a:ext cx="5484600" cy="3598560"/>
           </a:xfrm>
           <a:prstGeom prst="rect">
             <a:avLst/>
@@ -991,7 +985,7 @@
         <p:spPr>
           <a:xfrm>
             <a:off x="3884760" y="8685360"/>
-            <a:ext cx="2970360" cy="457200"/>
+            <a:ext cx="2970000" cy="456840"/>
           </a:xfrm>
           <a:prstGeom prst="rect">
             <a:avLst/>
@@ -1027,7 +1021,7 @@
               </a:lnSpc>
               <a:buNone/>
             </a:pPr>
-            <a:fld id="{0E3DFBE3-3AF9-4A4C-8DEB-A2A32636D596}" type="slidenum">
+            <a:fld id="{8A2C74D8-5D50-4FA2-9DC9-C2FD4412368F}" type="slidenum">
               <a:rPr b="0" lang="en-US" sz="1200" spc="-1" strike="noStrike">
                 <a:solidFill>
                   <a:srgbClr val="000000"/>
@@ -1078,7 +1072,7 @@
         <p:spPr>
           <a:xfrm>
             <a:off x="685800" y="1143000"/>
-            <a:ext cx="5484960" cy="3084840"/>
+            <a:ext cx="5484600" cy="3084480"/>
           </a:xfrm>
           <a:prstGeom prst="rect">
             <a:avLst/>
@@ -1101,7 +1095,7 @@
         <p:spPr>
           <a:xfrm>
             <a:off x="685800" y="4400640"/>
-            <a:ext cx="5484960" cy="3598920"/>
+            <a:ext cx="5484600" cy="3598560"/>
           </a:xfrm>
           <a:prstGeom prst="rect">
             <a:avLst/>
@@ -1135,7 +1129,7 @@
         <p:spPr>
           <a:xfrm>
             <a:off x="3884760" y="8685360"/>
-            <a:ext cx="2970360" cy="457200"/>
+            <a:ext cx="2970000" cy="456840"/>
           </a:xfrm>
           <a:prstGeom prst="rect">
             <a:avLst/>
@@ -1171,7 +1165,7 @@
               </a:lnSpc>
               <a:buNone/>
             </a:pPr>
-            <a:fld id="{BB43B179-F7C0-4FB5-886F-BC04EBE35FDB}" type="slidenum">
+            <a:fld id="{C8DE6346-28BF-4442-A1D2-DD3CEE8334A4}" type="slidenum">
               <a:rPr b="0" lang="en-US" sz="1200" spc="-1" strike="noStrike">
                 <a:solidFill>
                   <a:srgbClr val="000000"/>
@@ -1222,7 +1216,7 @@
         <p:spPr>
           <a:xfrm>
             <a:off x="685800" y="1143000"/>
-            <a:ext cx="5484960" cy="3084840"/>
+            <a:ext cx="5484600" cy="3084480"/>
           </a:xfrm>
           <a:prstGeom prst="rect">
             <a:avLst/>
@@ -1245,7 +1239,7 @@
         <p:spPr>
           <a:xfrm>
             <a:off x="685800" y="4400640"/>
-            <a:ext cx="5484960" cy="3598920"/>
+            <a:ext cx="5484600" cy="3598560"/>
           </a:xfrm>
           <a:prstGeom prst="rect">
             <a:avLst/>
@@ -1279,7 +1273,7 @@
         <p:spPr>
           <a:xfrm>
             <a:off x="3884760" y="8685360"/>
-            <a:ext cx="2970360" cy="457200"/>
+            <a:ext cx="2970000" cy="456840"/>
           </a:xfrm>
           <a:prstGeom prst="rect">
             <a:avLst/>
@@ -1315,7 +1309,7 @@
               </a:lnSpc>
               <a:buNone/>
             </a:pPr>
-            <a:fld id="{82FC9BC6-4888-4561-8714-6F5F1BEA95FE}" type="slidenum">
+            <a:fld id="{79A0F318-12DD-4F52-8DC1-44EF2315F49E}" type="slidenum">
               <a:rPr b="0" lang="en-US" sz="1200" spc="-1" strike="noStrike">
                 <a:solidFill>
                   <a:srgbClr val="000000"/>
@@ -1366,7 +1360,7 @@
         <p:spPr>
           <a:xfrm>
             <a:off x="685800" y="1143000"/>
-            <a:ext cx="5484960" cy="3084840"/>
+            <a:ext cx="5484600" cy="3084480"/>
           </a:xfrm>
           <a:prstGeom prst="rect">
             <a:avLst/>
@@ -1389,7 +1383,7 @@
         <p:spPr>
           <a:xfrm>
             <a:off x="685800" y="4400640"/>
-            <a:ext cx="5484960" cy="3598920"/>
+            <a:ext cx="5484600" cy="3598560"/>
           </a:xfrm>
           <a:prstGeom prst="rect">
             <a:avLst/>
@@ -1423,7 +1417,7 @@
         <p:spPr>
           <a:xfrm>
             <a:off x="3884760" y="8685360"/>
-            <a:ext cx="2970360" cy="457200"/>
+            <a:ext cx="2970000" cy="456840"/>
           </a:xfrm>
           <a:prstGeom prst="rect">
             <a:avLst/>
@@ -1459,7 +1453,7 @@
               </a:lnSpc>
               <a:buNone/>
             </a:pPr>
-            <a:fld id="{2BA927C0-33E9-44E5-B749-8F0C193DCF16}" type="slidenum">
+            <a:fld id="{251E2681-837C-4CEA-B4C3-3ECF389F8F01}" type="slidenum">
               <a:rPr b="0" lang="en-US" sz="1200" spc="-1" strike="noStrike">
                 <a:solidFill>
                   <a:srgbClr val="000000"/>
@@ -1510,7 +1504,7 @@
         <p:spPr>
           <a:xfrm>
             <a:off x="685800" y="1143000"/>
-            <a:ext cx="5484960" cy="3084840"/>
+            <a:ext cx="5484600" cy="3084480"/>
           </a:xfrm>
           <a:prstGeom prst="rect">
             <a:avLst/>
@@ -1533,7 +1527,7 @@
         <p:spPr>
           <a:xfrm>
             <a:off x="685800" y="4400640"/>
-            <a:ext cx="5484960" cy="3598920"/>
+            <a:ext cx="5484600" cy="3598560"/>
           </a:xfrm>
           <a:prstGeom prst="rect">
             <a:avLst/>
@@ -1567,7 +1561,7 @@
         <p:spPr>
           <a:xfrm>
             <a:off x="3884760" y="8685360"/>
-            <a:ext cx="2970360" cy="457200"/>
+            <a:ext cx="2970000" cy="456840"/>
           </a:xfrm>
           <a:prstGeom prst="rect">
             <a:avLst/>
@@ -1603,7 +1597,7 @@
               </a:lnSpc>
               <a:buNone/>
             </a:pPr>
-            <a:fld id="{878FB772-7CBC-4314-BC8A-3349045BFFE8}" type="slidenum">
+            <a:fld id="{2217D8E5-E123-4739-B3B4-67D58A8CF5B5}" type="slidenum">
               <a:rPr b="0" lang="en-US" sz="1200" spc="-1" strike="noStrike">
                 <a:solidFill>
                   <a:srgbClr val="000000"/>
@@ -1654,7 +1648,7 @@
         <p:spPr>
           <a:xfrm>
             <a:off x="685800" y="1143000"/>
-            <a:ext cx="5484960" cy="3084840"/>
+            <a:ext cx="5484600" cy="3084480"/>
           </a:xfrm>
           <a:prstGeom prst="rect">
             <a:avLst/>
@@ -1677,7 +1671,7 @@
         <p:spPr>
           <a:xfrm>
             <a:off x="685800" y="4400640"/>
-            <a:ext cx="5484960" cy="3598920"/>
+            <a:ext cx="5484600" cy="3598560"/>
           </a:xfrm>
           <a:prstGeom prst="rect">
             <a:avLst/>
@@ -1711,7 +1705,7 @@
         <p:spPr>
           <a:xfrm>
             <a:off x="3884760" y="8685360"/>
-            <a:ext cx="2970360" cy="457200"/>
+            <a:ext cx="2970000" cy="456840"/>
           </a:xfrm>
           <a:prstGeom prst="rect">
             <a:avLst/>
@@ -1747,7 +1741,7 @@
               </a:lnSpc>
               <a:buNone/>
             </a:pPr>
-            <a:fld id="{7595AFBB-8999-45D3-81E9-F759CC85A40E}" type="slidenum">
+            <a:fld id="{E0912D0A-7B38-4688-9170-E4B71E06EDF8}" type="slidenum">
               <a:rPr b="0" lang="en-US" sz="1200" spc="-1" strike="noStrike">
                 <a:solidFill>
                   <a:srgbClr val="000000"/>
@@ -1798,7 +1792,7 @@
         <p:spPr>
           <a:xfrm>
             <a:off x="685800" y="1143000"/>
-            <a:ext cx="5484960" cy="3084840"/>
+            <a:ext cx="5484600" cy="3084480"/>
           </a:xfrm>
           <a:prstGeom prst="rect">
             <a:avLst/>
@@ -1821,7 +1815,7 @@
         <p:spPr>
           <a:xfrm>
             <a:off x="685800" y="4400640"/>
-            <a:ext cx="5484960" cy="3598920"/>
+            <a:ext cx="5484600" cy="3598560"/>
           </a:xfrm>
           <a:prstGeom prst="rect">
             <a:avLst/>
@@ -1855,7 +1849,7 @@
         <p:spPr>
           <a:xfrm>
             <a:off x="3884760" y="8685360"/>
-            <a:ext cx="2970360" cy="457200"/>
+            <a:ext cx="2970000" cy="456840"/>
           </a:xfrm>
           <a:prstGeom prst="rect">
             <a:avLst/>
@@ -1891,7 +1885,7 @@
               </a:lnSpc>
               <a:buNone/>
             </a:pPr>
-            <a:fld id="{1BBE1122-1608-4852-B873-99B29C0F5F34}" type="slidenum">
+            <a:fld id="{0FF4D9F9-F2F2-4657-A164-B5300E05F805}" type="slidenum">
               <a:rPr b="0" lang="en-US" sz="1200" spc="-1" strike="noStrike">
                 <a:solidFill>
                   <a:srgbClr val="000000"/>
@@ -1942,7 +1936,7 @@
         <p:spPr>
           <a:xfrm>
             <a:off x="685800" y="1143000"/>
-            <a:ext cx="5484960" cy="3084840"/>
+            <a:ext cx="5484600" cy="3084480"/>
           </a:xfrm>
           <a:prstGeom prst="rect">
             <a:avLst/>
@@ -1965,7 +1959,7 @@
         <p:spPr>
           <a:xfrm>
             <a:off x="685800" y="4400640"/>
-            <a:ext cx="5484960" cy="3598920"/>
+            <a:ext cx="5484600" cy="3598560"/>
           </a:xfrm>
           <a:prstGeom prst="rect">
             <a:avLst/>
@@ -1999,7 +1993,7 @@
         <p:spPr>
           <a:xfrm>
             <a:off x="3884760" y="8685360"/>
-            <a:ext cx="2970360" cy="457200"/>
+            <a:ext cx="2970000" cy="456840"/>
           </a:xfrm>
           <a:prstGeom prst="rect">
             <a:avLst/>
@@ -2035,7 +2029,7 @@
               </a:lnSpc>
               <a:buNone/>
             </a:pPr>
-            <a:fld id="{0CF94D59-8FC4-44E5-A0B9-FCFE7BF0A46E}" type="slidenum">
+            <a:fld id="{42EB8983-D2B6-4CEA-AA89-73495D7F447F}" type="slidenum">
               <a:rPr b="0" lang="en-US" sz="1200" spc="-1" strike="noStrike">
                 <a:solidFill>
                   <a:srgbClr val="000000"/>
@@ -2086,7 +2080,7 @@
         <p:spPr>
           <a:xfrm>
             <a:off x="685800" y="1143000"/>
-            <a:ext cx="5484960" cy="3084840"/>
+            <a:ext cx="5484600" cy="3084480"/>
           </a:xfrm>
           <a:prstGeom prst="rect">
             <a:avLst/>
@@ -2109,7 +2103,7 @@
         <p:spPr>
           <a:xfrm>
             <a:off x="685800" y="4400640"/>
-            <a:ext cx="5484960" cy="3598920"/>
+            <a:ext cx="5484600" cy="3598560"/>
           </a:xfrm>
           <a:prstGeom prst="rect">
             <a:avLst/>
@@ -2143,7 +2137,7 @@
         <p:spPr>
           <a:xfrm>
             <a:off x="3884760" y="8685360"/>
-            <a:ext cx="2970360" cy="457200"/>
+            <a:ext cx="2970000" cy="456840"/>
           </a:xfrm>
           <a:prstGeom prst="rect">
             <a:avLst/>
@@ -2179,7 +2173,7 @@
               </a:lnSpc>
               <a:buNone/>
             </a:pPr>
-            <a:fld id="{EF5845E8-DD4D-46FB-BEEE-B1E216811484}" type="slidenum">
+            <a:fld id="{AE0CFBFD-8CC2-4D23-B177-8756A23E701C}" type="slidenum">
               <a:rPr b="0" lang="en-US" sz="1200" spc="-1" strike="noStrike">
                 <a:solidFill>
                   <a:srgbClr val="000000"/>
@@ -3783,49 +3777,7 @@
               <a:rPr b="0" lang="en-IN" sz="4400" spc="-1" strike="noStrike">
                 <a:latin typeface="Arial"/>
               </a:rPr>
-              <a:t>Click </a:t>
-            </a:r>
-            <a:r>
-              <a:rPr b="0" lang="en-IN" sz="4400" spc="-1" strike="noStrike">
-                <a:latin typeface="Arial"/>
-              </a:rPr>
-              <a:t>to </a:t>
-            </a:r>
-            <a:r>
-              <a:rPr b="0" lang="en-IN" sz="4400" spc="-1" strike="noStrike">
-                <a:latin typeface="Arial"/>
-              </a:rPr>
-              <a:t>edit </a:t>
-            </a:r>
-            <a:r>
-              <a:rPr b="0" lang="en-IN" sz="4400" spc="-1" strike="noStrike">
-                <a:latin typeface="Arial"/>
-              </a:rPr>
-              <a:t>the </a:t>
-            </a:r>
-            <a:r>
-              <a:rPr b="0" lang="en-IN" sz="4400" spc="-1" strike="noStrike">
-                <a:latin typeface="Arial"/>
-              </a:rPr>
-              <a:t>title </a:t>
-            </a:r>
-            <a:r>
-              <a:rPr b="0" lang="en-IN" sz="4400" spc="-1" strike="noStrike">
-                <a:latin typeface="Arial"/>
-              </a:rPr>
-              <a:t>text </a:t>
-            </a:r>
-            <a:r>
-              <a:rPr b="0" lang="en-IN" sz="4400" spc="-1" strike="noStrike">
-                <a:latin typeface="Arial"/>
-              </a:rPr>
-              <a:t>form</a:t>
-            </a:r>
-            <a:r>
-              <a:rPr b="0" lang="en-IN" sz="4400" spc="-1" strike="noStrike">
-                <a:latin typeface="Arial"/>
-              </a:rPr>
-              <a:t>at</a:t>
+              <a:t>Click to edit the title text format</a:t>
             </a:r>
             <a:endParaRPr b="0" lang="en-IN" sz="4400" spc="-1" strike="noStrike">
               <a:latin typeface="Arial"/>
@@ -4069,7 +4021,7 @@
         <p:spPr>
           <a:xfrm>
             <a:off x="0" y="0"/>
-            <a:ext cx="3473280" cy="5142240"/>
+            <a:ext cx="3472920" cy="5141880"/>
           </a:xfrm>
           <a:prstGeom prst="rect">
             <a:avLst/>
@@ -4100,7 +4052,7 @@
         <p:spPr>
           <a:xfrm>
             <a:off x="3474720" y="0"/>
-            <a:ext cx="53280" cy="5142240"/>
+            <a:ext cx="52920" cy="5141880"/>
           </a:xfrm>
           <a:prstGeom prst="rect">
             <a:avLst/>
@@ -4131,7 +4083,7 @@
         <p:spPr>
           <a:xfrm>
             <a:off x="457200" y="548640"/>
-            <a:ext cx="2376000" cy="2376000"/>
+            <a:ext cx="2375640" cy="2375640"/>
           </a:xfrm>
           <a:prstGeom prst="ellipse">
             <a:avLst/>
@@ -4162,7 +4114,7 @@
         <p:spPr>
           <a:xfrm>
             <a:off x="457200" y="548640"/>
-            <a:ext cx="2376000" cy="2376000"/>
+            <a:ext cx="2375640" cy="2375640"/>
           </a:xfrm>
           <a:prstGeom prst="rect">
             <a:avLst/>
@@ -4217,7 +4169,7 @@
         <p:spPr>
           <a:xfrm>
             <a:off x="274320" y="3108960"/>
-            <a:ext cx="2924640" cy="410040"/>
+            <a:ext cx="2924280" cy="409680"/>
           </a:xfrm>
           <a:prstGeom prst="rect">
             <a:avLst/>
@@ -4248,7 +4200,7 @@
               </a:tabLst>
             </a:pPr>
             <a:r>
-              <a:rPr b="1" lang="en-US" sz="1300" spc="389" strike="noStrike">
+              <a:rPr b="1" lang="en-US" sz="1300" spc="386" strike="noStrike">
                 <a:solidFill>
                   <a:srgbClr val="38bdf8"/>
                 </a:solidFill>
@@ -4272,7 +4224,7 @@
         <p:spPr>
           <a:xfrm>
             <a:off x="3749040" y="457200"/>
-            <a:ext cx="5210640" cy="1370160"/>
+            <a:ext cx="5210280" cy="1369800"/>
           </a:xfrm>
           <a:prstGeom prst="rect">
             <a:avLst/>
@@ -4351,7 +4303,7 @@
         <p:spPr>
           <a:xfrm>
             <a:off x="3749040" y="1874520"/>
-            <a:ext cx="5210640" cy="410040"/>
+            <a:ext cx="5210280" cy="409680"/>
           </a:xfrm>
           <a:prstGeom prst="rect">
             <a:avLst/>
@@ -4406,7 +4358,7 @@
         <p:spPr>
           <a:xfrm>
             <a:off x="3749040" y="2377440"/>
-            <a:ext cx="5210640" cy="35280"/>
+            <a:ext cx="5210280" cy="34920"/>
           </a:xfrm>
           <a:prstGeom prst="rect">
             <a:avLst/>
@@ -4437,7 +4389,7 @@
         <p:spPr>
           <a:xfrm>
             <a:off x="3749040" y="2560320"/>
-            <a:ext cx="5210640" cy="2193120"/>
+            <a:ext cx="5210280" cy="2192760"/>
           </a:xfrm>
           <a:prstGeom prst="rect">
             <a:avLst/>
@@ -4630,7 +4582,7 @@
         <p:spPr>
           <a:xfrm>
             <a:off x="0" y="0"/>
-            <a:ext cx="62640" cy="5142240"/>
+            <a:ext cx="62280" cy="5141880"/>
           </a:xfrm>
           <a:prstGeom prst="rect">
             <a:avLst/>
@@ -4661,7 +4613,7 @@
         <p:spPr>
           <a:xfrm>
             <a:off x="0" y="0"/>
-            <a:ext cx="9142560" cy="711720"/>
+            <a:ext cx="9142200" cy="711360"/>
           </a:xfrm>
           <a:prstGeom prst="rect">
             <a:avLst/>
@@ -4692,7 +4644,7 @@
         <p:spPr>
           <a:xfrm>
             <a:off x="182880" y="0"/>
-            <a:ext cx="7130880" cy="711720"/>
+            <a:ext cx="7130520" cy="711360"/>
           </a:xfrm>
           <a:prstGeom prst="rect">
             <a:avLst/>
@@ -4747,7 +4699,7 @@
         <p:spPr>
           <a:xfrm>
             <a:off x="7589520" y="109800"/>
-            <a:ext cx="1370160" cy="474120"/>
+            <a:ext cx="1369800" cy="473760"/>
           </a:xfrm>
           <a:prstGeom prst="rect">
             <a:avLst/>
@@ -4785,7 +4737,7 @@
         <p:spPr>
           <a:xfrm>
             <a:off x="7589520" y="109800"/>
-            <a:ext cx="1370160" cy="474120"/>
+            <a:ext cx="1369800" cy="473760"/>
           </a:xfrm>
           <a:prstGeom prst="rect">
             <a:avLst/>
@@ -4840,7 +4792,7 @@
         <p:spPr>
           <a:xfrm>
             <a:off x="182880" y="804600"/>
-            <a:ext cx="2833200" cy="1077480"/>
+            <a:ext cx="2832840" cy="1077120"/>
           </a:xfrm>
           <a:prstGeom prst="rect">
             <a:avLst/>
@@ -4878,7 +4830,7 @@
         <p:spPr>
           <a:xfrm>
             <a:off x="182880" y="804600"/>
-            <a:ext cx="2833200" cy="53280"/>
+            <a:ext cx="2832840" cy="52920"/>
           </a:xfrm>
           <a:prstGeom prst="rect">
             <a:avLst/>
@@ -4909,7 +4861,7 @@
         <p:spPr>
           <a:xfrm>
             <a:off x="320040" y="896040"/>
-            <a:ext cx="2558880" cy="345960"/>
+            <a:ext cx="2558520" cy="345600"/>
           </a:xfrm>
           <a:prstGeom prst="rect">
             <a:avLst/>
@@ -4964,7 +4916,7 @@
         <p:spPr>
           <a:xfrm>
             <a:off x="320040" y="1261800"/>
-            <a:ext cx="2558880" cy="501480"/>
+            <a:ext cx="2558520" cy="501120"/>
           </a:xfrm>
           <a:prstGeom prst="rect">
             <a:avLst/>
@@ -5019,7 +4971,7 @@
         <p:spPr>
           <a:xfrm>
             <a:off x="3154680" y="804600"/>
-            <a:ext cx="2833200" cy="1077480"/>
+            <a:ext cx="2832840" cy="1077120"/>
           </a:xfrm>
           <a:prstGeom prst="rect">
             <a:avLst/>
@@ -5057,7 +5009,7 @@
         <p:spPr>
           <a:xfrm>
             <a:off x="3154680" y="804600"/>
-            <a:ext cx="2833200" cy="53280"/>
+            <a:ext cx="2832840" cy="52920"/>
           </a:xfrm>
           <a:prstGeom prst="rect">
             <a:avLst/>
@@ -5088,7 +5040,7 @@
         <p:spPr>
           <a:xfrm>
             <a:off x="3291840" y="896040"/>
-            <a:ext cx="2558880" cy="345960"/>
+            <a:ext cx="2558520" cy="345600"/>
           </a:xfrm>
           <a:prstGeom prst="rect">
             <a:avLst/>
@@ -5143,7 +5095,7 @@
         <p:spPr>
           <a:xfrm>
             <a:off x="3291840" y="1261800"/>
-            <a:ext cx="2558880" cy="501480"/>
+            <a:ext cx="2558520" cy="501120"/>
           </a:xfrm>
           <a:prstGeom prst="rect">
             <a:avLst/>
@@ -5198,7 +5150,7 @@
         <p:spPr>
           <a:xfrm>
             <a:off x="6126480" y="804600"/>
-            <a:ext cx="2833200" cy="1077480"/>
+            <a:ext cx="2832840" cy="1077120"/>
           </a:xfrm>
           <a:prstGeom prst="rect">
             <a:avLst/>
@@ -5236,7 +5188,7 @@
         <p:spPr>
           <a:xfrm>
             <a:off x="6126480" y="804600"/>
-            <a:ext cx="2833200" cy="53280"/>
+            <a:ext cx="2832840" cy="52920"/>
           </a:xfrm>
           <a:prstGeom prst="rect">
             <a:avLst/>
@@ -5267,7 +5219,7 @@
         <p:spPr>
           <a:xfrm>
             <a:off x="6263640" y="896040"/>
-            <a:ext cx="2558880" cy="345960"/>
+            <a:ext cx="2558520" cy="345600"/>
           </a:xfrm>
           <a:prstGeom prst="rect">
             <a:avLst/>
@@ -5322,7 +5274,7 @@
         <p:spPr>
           <a:xfrm>
             <a:off x="6263640" y="1261800"/>
-            <a:ext cx="2558880" cy="501480"/>
+            <a:ext cx="2558520" cy="501120"/>
           </a:xfrm>
           <a:prstGeom prst="rect">
             <a:avLst/>
@@ -5377,7 +5329,7 @@
         <p:spPr>
           <a:xfrm>
             <a:off x="-537120" y="1974960"/>
-            <a:ext cx="5577120" cy="4325040"/>
+            <a:ext cx="5576760" cy="4324680"/>
           </a:xfrm>
           <a:prstGeom prst="rect">
             <a:avLst/>
@@ -5415,7 +5367,7 @@
         <p:spPr>
           <a:xfrm>
             <a:off x="182880" y="1974960"/>
-            <a:ext cx="5667840" cy="254520"/>
+            <a:ext cx="5667480" cy="254160"/>
           </a:xfrm>
           <a:prstGeom prst="rect">
             <a:avLst/>
@@ -5446,7 +5398,7 @@
         <p:spPr>
           <a:xfrm>
             <a:off x="292680" y="2039040"/>
-            <a:ext cx="108360" cy="108360"/>
+            <a:ext cx="108000" cy="108000"/>
           </a:xfrm>
           <a:prstGeom prst="ellipse">
             <a:avLst/>
@@ -5477,7 +5429,7 @@
         <p:spPr>
           <a:xfrm>
             <a:off x="475560" y="2039040"/>
-            <a:ext cx="108360" cy="108360"/>
+            <a:ext cx="108000" cy="108000"/>
           </a:xfrm>
           <a:prstGeom prst="ellipse">
             <a:avLst/>
@@ -5508,7 +5460,7 @@
         <p:spPr>
           <a:xfrm>
             <a:off x="658440" y="2039040"/>
-            <a:ext cx="108360" cy="108360"/>
+            <a:ext cx="108000" cy="108000"/>
           </a:xfrm>
           <a:prstGeom prst="ellipse">
             <a:avLst/>
@@ -5539,7 +5491,7 @@
         <p:spPr>
           <a:xfrm>
             <a:off x="182880" y="1993320"/>
-            <a:ext cx="5576400" cy="199800"/>
+            <a:ext cx="5576040" cy="199440"/>
           </a:xfrm>
           <a:prstGeom prst="rect">
             <a:avLst/>
@@ -5594,7 +5546,7 @@
         <p:spPr>
           <a:xfrm>
             <a:off x="320760" y="2249280"/>
-            <a:ext cx="5439240" cy="2531520"/>
+            <a:ext cx="5438880" cy="2531160"/>
           </a:xfrm>
           <a:prstGeom prst="rect">
             <a:avLst/>
@@ -6404,7 +6356,7 @@
         <p:spPr>
           <a:xfrm>
             <a:off x="6035040" y="1974960"/>
-            <a:ext cx="2924640" cy="2878920"/>
+            <a:ext cx="2924280" cy="2878560"/>
           </a:xfrm>
           <a:prstGeom prst="rect">
             <a:avLst/>
@@ -6442,7 +6394,7 @@
         <p:spPr>
           <a:xfrm>
             <a:off x="6172200" y="2084760"/>
-            <a:ext cx="2650320" cy="592920"/>
+            <a:ext cx="2649960" cy="592560"/>
           </a:xfrm>
           <a:prstGeom prst="rect">
             <a:avLst/>
@@ -6521,7 +6473,7 @@
         <p:spPr>
           <a:xfrm>
             <a:off x="6172200" y="2743200"/>
-            <a:ext cx="2650320" cy="2010240"/>
+            <a:ext cx="2649960" cy="2009880"/>
           </a:xfrm>
           <a:prstGeom prst="rect">
             <a:avLst/>
@@ -6689,7 +6641,7 @@
         <p:spPr>
           <a:xfrm>
             <a:off x="0" y="0"/>
-            <a:ext cx="62640" cy="5142240"/>
+            <a:ext cx="62280" cy="5141880"/>
           </a:xfrm>
           <a:prstGeom prst="rect">
             <a:avLst/>
@@ -6720,7 +6672,7 @@
         <p:spPr>
           <a:xfrm>
             <a:off x="0" y="0"/>
-            <a:ext cx="9142560" cy="711720"/>
+            <a:ext cx="9142200" cy="711360"/>
           </a:xfrm>
           <a:prstGeom prst="rect">
             <a:avLst/>
@@ -6751,7 +6703,7 @@
         <p:spPr>
           <a:xfrm>
             <a:off x="182880" y="0"/>
-            <a:ext cx="7130880" cy="711720"/>
+            <a:ext cx="7130520" cy="711360"/>
           </a:xfrm>
           <a:prstGeom prst="rect">
             <a:avLst/>
@@ -6806,7 +6758,7 @@
         <p:spPr>
           <a:xfrm>
             <a:off x="7589520" y="109800"/>
-            <a:ext cx="1370160" cy="474120"/>
+            <a:ext cx="1369800" cy="473760"/>
           </a:xfrm>
           <a:prstGeom prst="rect">
             <a:avLst/>
@@ -6844,7 +6796,7 @@
         <p:spPr>
           <a:xfrm>
             <a:off x="7589520" y="109800"/>
-            <a:ext cx="1370160" cy="474120"/>
+            <a:ext cx="1369800" cy="473760"/>
           </a:xfrm>
           <a:prstGeom prst="rect">
             <a:avLst/>
@@ -6899,7 +6851,7 @@
         <p:spPr>
           <a:xfrm>
             <a:off x="182880" y="777240"/>
-            <a:ext cx="8776800" cy="345960"/>
+            <a:ext cx="8776440" cy="345600"/>
           </a:xfrm>
           <a:prstGeom prst="rect">
             <a:avLst/>
@@ -6954,7 +6906,7 @@
         <p:spPr>
           <a:xfrm>
             <a:off x="182880" y="1207080"/>
-            <a:ext cx="5036040" cy="4191840"/>
+            <a:ext cx="5035680" cy="4191480"/>
           </a:xfrm>
           <a:prstGeom prst="rect">
             <a:avLst/>
@@ -6992,7 +6944,7 @@
         <p:spPr>
           <a:xfrm>
             <a:off x="182880" y="1207080"/>
-            <a:ext cx="5027760" cy="254520"/>
+            <a:ext cx="5027400" cy="254160"/>
           </a:xfrm>
           <a:prstGeom prst="rect">
             <a:avLst/>
@@ -7023,7 +6975,7 @@
         <p:spPr>
           <a:xfrm>
             <a:off x="292680" y="1271160"/>
-            <a:ext cx="108360" cy="108360"/>
+            <a:ext cx="108000" cy="108000"/>
           </a:xfrm>
           <a:prstGeom prst="ellipse">
             <a:avLst/>
@@ -7054,7 +7006,7 @@
         <p:spPr>
           <a:xfrm>
             <a:off x="475560" y="1271160"/>
-            <a:ext cx="108360" cy="108360"/>
+            <a:ext cx="108000" cy="108000"/>
           </a:xfrm>
           <a:prstGeom prst="ellipse">
             <a:avLst/>
@@ -7085,7 +7037,7 @@
         <p:spPr>
           <a:xfrm>
             <a:off x="658440" y="1271160"/>
-            <a:ext cx="108360" cy="108360"/>
+            <a:ext cx="108000" cy="108000"/>
           </a:xfrm>
           <a:prstGeom prst="ellipse">
             <a:avLst/>
@@ -7116,7 +7068,7 @@
         <p:spPr>
           <a:xfrm>
             <a:off x="182880" y="1225440"/>
-            <a:ext cx="4936320" cy="199800"/>
+            <a:ext cx="4935960" cy="199440"/>
           </a:xfrm>
           <a:prstGeom prst="rect">
             <a:avLst/>
@@ -7171,7 +7123,7 @@
         <p:spPr>
           <a:xfrm>
             <a:off x="292680" y="1481400"/>
-            <a:ext cx="4799160" cy="3308760"/>
+            <a:ext cx="4798800" cy="3308400"/>
           </a:xfrm>
           <a:prstGeom prst="rect">
             <a:avLst/>
@@ -8150,7 +8102,7 @@
         <p:spPr>
           <a:xfrm>
             <a:off x="5394960" y="1207080"/>
-            <a:ext cx="3564720" cy="657000"/>
+            <a:ext cx="3564360" cy="656640"/>
           </a:xfrm>
           <a:prstGeom prst="rect">
             <a:avLst/>
@@ -8188,7 +8140,7 @@
         <p:spPr>
           <a:xfrm>
             <a:off x="5394960" y="1207080"/>
-            <a:ext cx="53280" cy="657000"/>
+            <a:ext cx="52920" cy="656640"/>
           </a:xfrm>
           <a:prstGeom prst="rect">
             <a:avLst/>
@@ -8219,7 +8171,7 @@
         <p:spPr>
           <a:xfrm>
             <a:off x="5541120" y="1252800"/>
-            <a:ext cx="3336120" cy="254520"/>
+            <a:ext cx="3335760" cy="254160"/>
           </a:xfrm>
           <a:prstGeom prst="rect">
             <a:avLst/>
@@ -8274,7 +8226,7 @@
         <p:spPr>
           <a:xfrm>
             <a:off x="5541120" y="1517760"/>
-            <a:ext cx="3336120" cy="254520"/>
+            <a:ext cx="3335760" cy="254160"/>
           </a:xfrm>
           <a:prstGeom prst="rect">
             <a:avLst/>
@@ -8329,7 +8281,7 @@
         <p:spPr>
           <a:xfrm>
             <a:off x="5394960" y="1938600"/>
-            <a:ext cx="3564720" cy="657000"/>
+            <a:ext cx="3564360" cy="656640"/>
           </a:xfrm>
           <a:prstGeom prst="rect">
             <a:avLst/>
@@ -8367,7 +8319,7 @@
         <p:spPr>
           <a:xfrm>
             <a:off x="5394960" y="1938600"/>
-            <a:ext cx="53280" cy="657000"/>
+            <a:ext cx="52920" cy="656640"/>
           </a:xfrm>
           <a:prstGeom prst="rect">
             <a:avLst/>
@@ -8398,7 +8350,7 @@
         <p:spPr>
           <a:xfrm>
             <a:off x="5541120" y="1984320"/>
-            <a:ext cx="3336120" cy="254520"/>
+            <a:ext cx="3335760" cy="254160"/>
           </a:xfrm>
           <a:prstGeom prst="rect">
             <a:avLst/>
@@ -8453,7 +8405,7 @@
         <p:spPr>
           <a:xfrm>
             <a:off x="5541120" y="2249280"/>
-            <a:ext cx="3336120" cy="254520"/>
+            <a:ext cx="3335760" cy="254160"/>
           </a:xfrm>
           <a:prstGeom prst="rect">
             <a:avLst/>
@@ -8508,7 +8460,7 @@
         <p:spPr>
           <a:xfrm>
             <a:off x="5394960" y="2670120"/>
-            <a:ext cx="3564720" cy="657000"/>
+            <a:ext cx="3564360" cy="656640"/>
           </a:xfrm>
           <a:prstGeom prst="rect">
             <a:avLst/>
@@ -8546,7 +8498,7 @@
         <p:spPr>
           <a:xfrm>
             <a:off x="5394960" y="2670120"/>
-            <a:ext cx="53280" cy="657000"/>
+            <a:ext cx="52920" cy="656640"/>
           </a:xfrm>
           <a:prstGeom prst="rect">
             <a:avLst/>
@@ -8577,7 +8529,7 @@
         <p:spPr>
           <a:xfrm>
             <a:off x="5541120" y="2715840"/>
-            <a:ext cx="3336120" cy="254520"/>
+            <a:ext cx="3335760" cy="254160"/>
           </a:xfrm>
           <a:prstGeom prst="rect">
             <a:avLst/>
@@ -8632,7 +8584,7 @@
         <p:spPr>
           <a:xfrm>
             <a:off x="5541120" y="2980800"/>
-            <a:ext cx="3336120" cy="254520"/>
+            <a:ext cx="3335760" cy="254160"/>
           </a:xfrm>
           <a:prstGeom prst="rect">
             <a:avLst/>
@@ -8687,7 +8639,7 @@
         <p:spPr>
           <a:xfrm>
             <a:off x="5394960" y="3401640"/>
-            <a:ext cx="3564720" cy="657000"/>
+            <a:ext cx="3564360" cy="656640"/>
           </a:xfrm>
           <a:prstGeom prst="rect">
             <a:avLst/>
@@ -8725,7 +8677,7 @@
         <p:spPr>
           <a:xfrm>
             <a:off x="5394960" y="3401640"/>
-            <a:ext cx="53280" cy="657000"/>
+            <a:ext cx="52920" cy="656640"/>
           </a:xfrm>
           <a:prstGeom prst="rect">
             <a:avLst/>
@@ -8756,7 +8708,7 @@
         <p:spPr>
           <a:xfrm>
             <a:off x="5541120" y="3447360"/>
-            <a:ext cx="3336120" cy="254520"/>
+            <a:ext cx="3335760" cy="254160"/>
           </a:xfrm>
           <a:prstGeom prst="rect">
             <a:avLst/>
@@ -8811,7 +8763,7 @@
         <p:spPr>
           <a:xfrm>
             <a:off x="5541120" y="3712320"/>
-            <a:ext cx="3336120" cy="254520"/>
+            <a:ext cx="3335760" cy="254160"/>
           </a:xfrm>
           <a:prstGeom prst="rect">
             <a:avLst/>
@@ -8866,7 +8818,7 @@
         <p:spPr>
           <a:xfrm>
             <a:off x="5394960" y="4133160"/>
-            <a:ext cx="3564720" cy="657000"/>
+            <a:ext cx="3564360" cy="656640"/>
           </a:xfrm>
           <a:prstGeom prst="rect">
             <a:avLst/>
@@ -8904,7 +8856,7 @@
         <p:spPr>
           <a:xfrm>
             <a:off x="5394960" y="4133160"/>
-            <a:ext cx="53280" cy="657000"/>
+            <a:ext cx="52920" cy="656640"/>
           </a:xfrm>
           <a:prstGeom prst="rect">
             <a:avLst/>
@@ -8935,7 +8887,7 @@
         <p:spPr>
           <a:xfrm>
             <a:off x="5541120" y="4178880"/>
-            <a:ext cx="3336120" cy="254520"/>
+            <a:ext cx="3335760" cy="254160"/>
           </a:xfrm>
           <a:prstGeom prst="rect">
             <a:avLst/>
@@ -8990,7 +8942,7 @@
         <p:spPr>
           <a:xfrm>
             <a:off x="5541120" y="4443840"/>
-            <a:ext cx="3336120" cy="254520"/>
+            <a:ext cx="3335760" cy="254160"/>
           </a:xfrm>
           <a:prstGeom prst="rect">
             <a:avLst/>
@@ -9082,7 +9034,7 @@
         <p:spPr>
           <a:xfrm>
             <a:off x="0" y="0"/>
-            <a:ext cx="62640" cy="5142240"/>
+            <a:ext cx="62280" cy="5141880"/>
           </a:xfrm>
           <a:prstGeom prst="rect">
             <a:avLst/>
@@ -9113,7 +9065,7 @@
         <p:spPr>
           <a:xfrm>
             <a:off x="0" y="0"/>
-            <a:ext cx="9142560" cy="711720"/>
+            <a:ext cx="9142200" cy="711360"/>
           </a:xfrm>
           <a:prstGeom prst="rect">
             <a:avLst/>
@@ -9144,7 +9096,7 @@
         <p:spPr>
           <a:xfrm>
             <a:off x="182880" y="0"/>
-            <a:ext cx="7130880" cy="711720"/>
+            <a:ext cx="7130520" cy="711360"/>
           </a:xfrm>
           <a:prstGeom prst="rect">
             <a:avLst/>
@@ -9199,7 +9151,7 @@
         <p:spPr>
           <a:xfrm>
             <a:off x="7589520" y="109800"/>
-            <a:ext cx="1370160" cy="474120"/>
+            <a:ext cx="1369800" cy="473760"/>
           </a:xfrm>
           <a:prstGeom prst="rect">
             <a:avLst/>
@@ -9237,7 +9189,7 @@
         <p:spPr>
           <a:xfrm>
             <a:off x="7589520" y="109800"/>
-            <a:ext cx="1370160" cy="474120"/>
+            <a:ext cx="1369800" cy="473760"/>
           </a:xfrm>
           <a:prstGeom prst="rect">
             <a:avLst/>
@@ -10484,7 +10436,7 @@
         <p:spPr>
           <a:xfrm>
             <a:off x="182880" y="4736520"/>
-            <a:ext cx="8776800" cy="291240"/>
+            <a:ext cx="8776440" cy="290880"/>
           </a:xfrm>
           <a:prstGeom prst="rect">
             <a:avLst/>
@@ -10515,7 +10467,7 @@
         <p:spPr>
           <a:xfrm>
             <a:off x="320040" y="4754880"/>
-            <a:ext cx="8502480" cy="254520"/>
+            <a:ext cx="8502120" cy="254160"/>
           </a:xfrm>
           <a:prstGeom prst="rect">
             <a:avLst/>
@@ -10607,7 +10559,7 @@
         <p:spPr>
           <a:xfrm>
             <a:off x="30240" y="-449640"/>
-            <a:ext cx="9142560" cy="5142240"/>
+            <a:ext cx="9142200" cy="5141880"/>
           </a:xfrm>
           <a:prstGeom prst="rect">
             <a:avLst/>
@@ -10638,7 +10590,7 @@
         <p:spPr>
           <a:xfrm>
             <a:off x="0" y="0"/>
-            <a:ext cx="62640" cy="5142240"/>
+            <a:ext cx="62280" cy="5141880"/>
           </a:xfrm>
           <a:prstGeom prst="rect">
             <a:avLst/>
@@ -10669,7 +10621,7 @@
         <p:spPr>
           <a:xfrm>
             <a:off x="914400" y="360000"/>
-            <a:ext cx="7313760" cy="364320"/>
+            <a:ext cx="7313400" cy="363960"/>
           </a:xfrm>
           <a:prstGeom prst="rect">
             <a:avLst/>
@@ -10700,7 +10652,7 @@
               </a:tabLst>
             </a:pPr>
             <a:r>
-              <a:rPr b="1" lang="en-US" sz="1300" spc="488" strike="noStrike">
+              <a:rPr b="1" lang="en-US" sz="1300" spc="486" strike="noStrike">
                 <a:solidFill>
                   <a:srgbClr val="34d399"/>
                 </a:solidFill>
@@ -10723,8 +10675,8 @@
         </p:nvSpPr>
         <p:spPr>
           <a:xfrm rot="21587400">
-            <a:off x="910800" y="779760"/>
-            <a:ext cx="7313760" cy="1004400"/>
+            <a:off x="910800" y="779400"/>
+            <a:ext cx="7313400" cy="1004040"/>
           </a:xfrm>
           <a:prstGeom prst="rect">
             <a:avLst/>
@@ -10779,7 +10731,7 @@
         <p:spPr>
           <a:xfrm>
             <a:off x="900000" y="2114640"/>
-            <a:ext cx="7313760" cy="44280"/>
+            <a:ext cx="7313400" cy="43920"/>
           </a:xfrm>
           <a:prstGeom prst="rect">
             <a:avLst/>
@@ -10810,7 +10762,7 @@
         <p:spPr>
           <a:xfrm>
             <a:off x="914400" y="2240280"/>
-            <a:ext cx="318600" cy="364320"/>
+            <a:ext cx="318240" cy="363960"/>
           </a:xfrm>
           <a:prstGeom prst="rect">
             <a:avLst/>
@@ -10865,7 +10817,7 @@
         <p:spPr>
           <a:xfrm>
             <a:off x="1298520" y="2240280"/>
-            <a:ext cx="2010240" cy="345960"/>
+            <a:ext cx="2009880" cy="345600"/>
           </a:xfrm>
           <a:prstGeom prst="rect">
             <a:avLst/>
@@ -10920,7 +10872,7 @@
         <p:spPr>
           <a:xfrm>
             <a:off x="3474720" y="2277000"/>
-            <a:ext cx="5027760" cy="345960"/>
+            <a:ext cx="5027400" cy="345600"/>
           </a:xfrm>
           <a:prstGeom prst="rect">
             <a:avLst/>
@@ -10975,7 +10927,7 @@
         <p:spPr>
           <a:xfrm>
             <a:off x="914400" y="3108960"/>
-            <a:ext cx="318600" cy="364320"/>
+            <a:ext cx="318240" cy="363960"/>
           </a:xfrm>
           <a:prstGeom prst="rect">
             <a:avLst/>
@@ -11030,7 +10982,7 @@
         <p:spPr>
           <a:xfrm>
             <a:off x="1298520" y="3108960"/>
-            <a:ext cx="2010240" cy="345960"/>
+            <a:ext cx="2009880" cy="345600"/>
           </a:xfrm>
           <a:prstGeom prst="rect">
             <a:avLst/>
@@ -11085,7 +11037,7 @@
         <p:spPr>
           <a:xfrm>
             <a:off x="3474720" y="3145680"/>
-            <a:ext cx="5027760" cy="345960"/>
+            <a:ext cx="5027400" cy="345600"/>
           </a:xfrm>
           <a:prstGeom prst="rect">
             <a:avLst/>
@@ -11140,7 +11092,7 @@
         <p:spPr>
           <a:xfrm>
             <a:off x="914400" y="3977640"/>
-            <a:ext cx="318600" cy="364320"/>
+            <a:ext cx="318240" cy="363960"/>
           </a:xfrm>
           <a:prstGeom prst="rect">
             <a:avLst/>
@@ -11195,7 +11147,7 @@
         <p:spPr>
           <a:xfrm>
             <a:off x="1298520" y="3977640"/>
-            <a:ext cx="2010240" cy="345960"/>
+            <a:ext cx="2009880" cy="345600"/>
           </a:xfrm>
           <a:prstGeom prst="rect">
             <a:avLst/>
@@ -11250,7 +11202,7 @@
         <p:spPr>
           <a:xfrm>
             <a:off x="3474720" y="4014360"/>
-            <a:ext cx="5027760" cy="345960"/>
+            <a:ext cx="5027400" cy="345600"/>
           </a:xfrm>
           <a:prstGeom prst="rect">
             <a:avLst/>
@@ -11305,7 +11257,7 @@
         <p:spPr>
           <a:xfrm>
             <a:off x="914400" y="4709160"/>
-            <a:ext cx="7770960" cy="272880"/>
+            <a:ext cx="7770600" cy="272520"/>
           </a:xfrm>
           <a:prstGeom prst="rect">
             <a:avLst/>
@@ -11397,7 +11349,7 @@
         <p:spPr>
           <a:xfrm>
             <a:off x="0" y="0"/>
-            <a:ext cx="62640" cy="5142240"/>
+            <a:ext cx="62280" cy="5141880"/>
           </a:xfrm>
           <a:prstGeom prst="rect">
             <a:avLst/>
@@ -11428,7 +11380,7 @@
         <p:spPr>
           <a:xfrm>
             <a:off x="0" y="0"/>
-            <a:ext cx="9142560" cy="711720"/>
+            <a:ext cx="9142200" cy="711360"/>
           </a:xfrm>
           <a:prstGeom prst="rect">
             <a:avLst/>
@@ -11459,7 +11411,7 @@
         <p:spPr>
           <a:xfrm>
             <a:off x="182880" y="0"/>
-            <a:ext cx="7130880" cy="711720"/>
+            <a:ext cx="7130520" cy="711360"/>
           </a:xfrm>
           <a:prstGeom prst="rect">
             <a:avLst/>
@@ -11514,7 +11466,7 @@
         <p:spPr>
           <a:xfrm>
             <a:off x="7589520" y="109800"/>
-            <a:ext cx="1370160" cy="474120"/>
+            <a:ext cx="1369800" cy="473760"/>
           </a:xfrm>
           <a:prstGeom prst="rect">
             <a:avLst/>
@@ -11552,7 +11504,7 @@
         <p:spPr>
           <a:xfrm>
             <a:off x="7589520" y="109800"/>
-            <a:ext cx="1370160" cy="474120"/>
+            <a:ext cx="1369800" cy="473760"/>
           </a:xfrm>
           <a:prstGeom prst="rect">
             <a:avLst/>
@@ -11607,7 +11559,7 @@
         <p:spPr>
           <a:xfrm>
             <a:off x="182880" y="804600"/>
-            <a:ext cx="8776800" cy="1278720"/>
+            <a:ext cx="8776440" cy="1278360"/>
           </a:xfrm>
           <a:prstGeom prst="rect">
             <a:avLst/>
@@ -11645,7 +11597,7 @@
         <p:spPr>
           <a:xfrm>
             <a:off x="182880" y="804600"/>
-            <a:ext cx="53280" cy="1278720"/>
+            <a:ext cx="52920" cy="1278360"/>
           </a:xfrm>
           <a:prstGeom prst="rect">
             <a:avLst/>
@@ -11676,7 +11628,7 @@
         <p:spPr>
           <a:xfrm>
             <a:off x="365760" y="896040"/>
-            <a:ext cx="2741760" cy="272880"/>
+            <a:ext cx="2741400" cy="272520"/>
           </a:xfrm>
           <a:prstGeom prst="rect">
             <a:avLst/>
@@ -11707,7 +11659,7 @@
               </a:tabLst>
             </a:pPr>
             <a:r>
-              <a:rPr b="1" lang="en-US" sz="1000" spc="191" strike="noStrike">
+              <a:rPr b="1" lang="en-US" sz="1000" spc="188" strike="noStrike">
                 <a:solidFill>
                   <a:srgbClr val="38bdf8"/>
                 </a:solidFill>
@@ -11731,7 +11683,7 @@
         <p:spPr>
           <a:xfrm>
             <a:off x="365760" y="1188720"/>
-            <a:ext cx="8319600" cy="547200"/>
+            <a:ext cx="8319240" cy="546840"/>
           </a:xfrm>
           <a:prstGeom prst="rect">
             <a:avLst/>
@@ -11786,7 +11738,7 @@
         <p:spPr>
           <a:xfrm>
             <a:off x="182880" y="2212920"/>
-            <a:ext cx="5119200" cy="2604600"/>
+            <a:ext cx="5118840" cy="2604240"/>
           </a:xfrm>
           <a:prstGeom prst="rect">
             <a:avLst/>
@@ -11824,7 +11776,7 @@
         <p:spPr>
           <a:xfrm>
             <a:off x="182880" y="2212920"/>
-            <a:ext cx="5119200" cy="254520"/>
+            <a:ext cx="5118840" cy="254160"/>
           </a:xfrm>
           <a:prstGeom prst="rect">
             <a:avLst/>
@@ -11855,7 +11807,7 @@
         <p:spPr>
           <a:xfrm>
             <a:off x="292680" y="2277000"/>
-            <a:ext cx="108360" cy="108360"/>
+            <a:ext cx="108000" cy="108000"/>
           </a:xfrm>
           <a:prstGeom prst="ellipse">
             <a:avLst/>
@@ -11886,7 +11838,7 @@
         <p:spPr>
           <a:xfrm>
             <a:off x="475560" y="2277000"/>
-            <a:ext cx="108360" cy="108360"/>
+            <a:ext cx="108000" cy="108000"/>
           </a:xfrm>
           <a:prstGeom prst="ellipse">
             <a:avLst/>
@@ -11917,7 +11869,7 @@
         <p:spPr>
           <a:xfrm>
             <a:off x="658440" y="2277000"/>
-            <a:ext cx="108360" cy="108360"/>
+            <a:ext cx="108000" cy="108000"/>
           </a:xfrm>
           <a:prstGeom prst="ellipse">
             <a:avLst/>
@@ -11948,7 +11900,7 @@
         <p:spPr>
           <a:xfrm>
             <a:off x="182880" y="2231280"/>
-            <a:ext cx="5027760" cy="199800"/>
+            <a:ext cx="5027400" cy="199440"/>
           </a:xfrm>
           <a:prstGeom prst="rect">
             <a:avLst/>
@@ -12003,7 +11955,7 @@
         <p:spPr>
           <a:xfrm>
             <a:off x="292680" y="2487240"/>
-            <a:ext cx="4890600" cy="2257200"/>
+            <a:ext cx="4890240" cy="2256840"/>
           </a:xfrm>
           <a:prstGeom prst="rect">
             <a:avLst/>
@@ -12429,7 +12381,7 @@
         <p:spPr>
           <a:xfrm>
             <a:off x="5486400" y="2212920"/>
-            <a:ext cx="3473280" cy="2604600"/>
+            <a:ext cx="3472920" cy="2604240"/>
           </a:xfrm>
           <a:prstGeom prst="rect">
             <a:avLst/>
@@ -12467,7 +12419,7 @@
         <p:spPr>
           <a:xfrm>
             <a:off x="5623560" y="2331720"/>
-            <a:ext cx="3198960" cy="364320"/>
+            <a:ext cx="3198600" cy="363960"/>
           </a:xfrm>
           <a:prstGeom prst="rect">
             <a:avLst/>
@@ -12522,7 +12474,7 @@
         <p:spPr>
           <a:xfrm>
             <a:off x="5623560" y="2788920"/>
-            <a:ext cx="3198960" cy="1918800"/>
+            <a:ext cx="3198600" cy="1918440"/>
           </a:xfrm>
           <a:prstGeom prst="rect">
             <a:avLst/>
@@ -12715,7 +12667,7 @@
         <p:spPr>
           <a:xfrm>
             <a:off x="0" y="0"/>
-            <a:ext cx="9142560" cy="5142240"/>
+            <a:ext cx="9142200" cy="5141880"/>
           </a:xfrm>
           <a:prstGeom prst="rect">
             <a:avLst/>
@@ -12748,7 +12700,7 @@
         <p:spPr>
           <a:xfrm>
             <a:off x="274320" y="457200"/>
-            <a:ext cx="2284560" cy="2741760"/>
+            <a:ext cx="2284200" cy="2741400"/>
           </a:xfrm>
           <a:prstGeom prst="rect">
             <a:avLst/>
@@ -12805,7 +12757,7 @@
         <p:spPr>
           <a:xfrm>
             <a:off x="1005840" y="1645920"/>
-            <a:ext cx="7130880" cy="53280"/>
+            <a:ext cx="7130520" cy="52920"/>
           </a:xfrm>
           <a:prstGeom prst="rect">
             <a:avLst/>
@@ -12836,7 +12788,7 @@
         <p:spPr>
           <a:xfrm>
             <a:off x="1005840" y="1783080"/>
-            <a:ext cx="7770960" cy="1370160"/>
+            <a:ext cx="7770600" cy="1369800"/>
           </a:xfrm>
           <a:prstGeom prst="rect">
             <a:avLst/>
@@ -12891,7 +12843,7 @@
         <p:spPr>
           <a:xfrm>
             <a:off x="1005840" y="3200400"/>
-            <a:ext cx="7770960" cy="821520"/>
+            <a:ext cx="7770600" cy="821160"/>
           </a:xfrm>
           <a:prstGeom prst="rect">
             <a:avLst/>
@@ -12983,7 +12935,7 @@
         <p:spPr>
           <a:xfrm>
             <a:off x="0" y="0"/>
-            <a:ext cx="62640" cy="5142240"/>
+            <a:ext cx="62280" cy="5141880"/>
           </a:xfrm>
           <a:prstGeom prst="rect">
             <a:avLst/>
@@ -13014,7 +12966,7 @@
         <p:spPr>
           <a:xfrm>
             <a:off x="0" y="0"/>
-            <a:ext cx="9142560" cy="711720"/>
+            <a:ext cx="9142200" cy="711360"/>
           </a:xfrm>
           <a:prstGeom prst="rect">
             <a:avLst/>
@@ -13045,7 +12997,7 @@
         <p:spPr>
           <a:xfrm>
             <a:off x="182880" y="0"/>
-            <a:ext cx="7130880" cy="711720"/>
+            <a:ext cx="7130520" cy="711360"/>
           </a:xfrm>
           <a:prstGeom prst="rect">
             <a:avLst/>
@@ -13100,7 +13052,7 @@
         <p:spPr>
           <a:xfrm>
             <a:off x="7589520" y="109800"/>
-            <a:ext cx="1370160" cy="474120"/>
+            <a:ext cx="1369800" cy="473760"/>
           </a:xfrm>
           <a:prstGeom prst="rect">
             <a:avLst/>
@@ -13138,7 +13090,7 @@
         <p:spPr>
           <a:xfrm>
             <a:off x="7589520" y="109800"/>
-            <a:ext cx="1370160" cy="474120"/>
+            <a:ext cx="1369800" cy="473760"/>
           </a:xfrm>
           <a:prstGeom prst="rect">
             <a:avLst/>
@@ -13193,7 +13145,7 @@
         <p:spPr>
           <a:xfrm>
             <a:off x="182880" y="804600"/>
-            <a:ext cx="5216040" cy="4594320"/>
+            <a:ext cx="5215680" cy="4593960"/>
           </a:xfrm>
           <a:prstGeom prst="rect">
             <a:avLst/>
@@ -13231,7 +13183,7 @@
         <p:spPr>
           <a:xfrm>
             <a:off x="182880" y="804600"/>
-            <a:ext cx="5210640" cy="254520"/>
+            <a:ext cx="5210280" cy="254160"/>
           </a:xfrm>
           <a:prstGeom prst="rect">
             <a:avLst/>
@@ -13262,7 +13214,7 @@
         <p:spPr>
           <a:xfrm>
             <a:off x="292680" y="868680"/>
-            <a:ext cx="108360" cy="108360"/>
+            <a:ext cx="108000" cy="108000"/>
           </a:xfrm>
           <a:prstGeom prst="ellipse">
             <a:avLst/>
@@ -13293,7 +13245,7 @@
         <p:spPr>
           <a:xfrm>
             <a:off x="475560" y="868680"/>
-            <a:ext cx="108360" cy="108360"/>
+            <a:ext cx="108000" cy="108000"/>
           </a:xfrm>
           <a:prstGeom prst="ellipse">
             <a:avLst/>
@@ -13324,7 +13276,7 @@
         <p:spPr>
           <a:xfrm>
             <a:off x="658440" y="868680"/>
-            <a:ext cx="108360" cy="108360"/>
+            <a:ext cx="108000" cy="108000"/>
           </a:xfrm>
           <a:prstGeom prst="ellipse">
             <a:avLst/>
@@ -13355,7 +13307,7 @@
         <p:spPr>
           <a:xfrm>
             <a:off x="182880" y="822960"/>
-            <a:ext cx="5119200" cy="199800"/>
+            <a:ext cx="5118840" cy="199440"/>
           </a:xfrm>
           <a:prstGeom prst="rect">
             <a:avLst/>
@@ -13410,7 +13362,7 @@
         <p:spPr>
           <a:xfrm>
             <a:off x="292680" y="1078920"/>
-            <a:ext cx="4982040" cy="3720240"/>
+            <a:ext cx="4981680" cy="3719880"/>
           </a:xfrm>
           <a:prstGeom prst="rect">
             <a:avLst/>
@@ -14412,7 +14364,7 @@
         <p:spPr>
           <a:xfrm>
             <a:off x="5577840" y="804600"/>
-            <a:ext cx="3421080" cy="4338000"/>
+            <a:ext cx="3420720" cy="4337640"/>
           </a:xfrm>
           <a:prstGeom prst="rect">
             <a:avLst/>
@@ -14450,7 +14402,7 @@
         <p:spPr>
           <a:xfrm>
             <a:off x="5715000" y="896040"/>
-            <a:ext cx="3107520" cy="345960"/>
+            <a:ext cx="3107160" cy="345600"/>
           </a:xfrm>
           <a:prstGeom prst="rect">
             <a:avLst/>
@@ -14505,7 +14457,7 @@
         <p:spPr>
           <a:xfrm>
             <a:off x="5715000" y="1325880"/>
-            <a:ext cx="3107520" cy="254520"/>
+            <a:ext cx="3107160" cy="254160"/>
           </a:xfrm>
           <a:prstGeom prst="rect">
             <a:avLst/>
@@ -14560,7 +14512,7 @@
         <p:spPr>
           <a:xfrm>
             <a:off x="5715000" y="1581840"/>
-            <a:ext cx="3107520" cy="455760"/>
+            <a:ext cx="3107160" cy="455400"/>
           </a:xfrm>
           <a:prstGeom prst="rect">
             <a:avLst/>
@@ -14615,7 +14567,7 @@
         <p:spPr>
           <a:xfrm>
             <a:off x="5715000" y="2103120"/>
-            <a:ext cx="3107520" cy="254520"/>
+            <a:ext cx="3107160" cy="254160"/>
           </a:xfrm>
           <a:prstGeom prst="rect">
             <a:avLst/>
@@ -14670,7 +14622,7 @@
         <p:spPr>
           <a:xfrm>
             <a:off x="5715000" y="2359080"/>
-            <a:ext cx="3107520" cy="455760"/>
+            <a:ext cx="3107160" cy="455400"/>
           </a:xfrm>
           <a:prstGeom prst="rect">
             <a:avLst/>
@@ -14725,7 +14677,7 @@
         <p:spPr>
           <a:xfrm>
             <a:off x="5715000" y="2880360"/>
-            <a:ext cx="3107520" cy="254520"/>
+            <a:ext cx="3107160" cy="254160"/>
           </a:xfrm>
           <a:prstGeom prst="rect">
             <a:avLst/>
@@ -14780,7 +14732,7 @@
         <p:spPr>
           <a:xfrm>
             <a:off x="5715000" y="3136320"/>
-            <a:ext cx="3107520" cy="455760"/>
+            <a:ext cx="3107160" cy="455400"/>
           </a:xfrm>
           <a:prstGeom prst="rect">
             <a:avLst/>
@@ -14835,7 +14787,7 @@
         <p:spPr>
           <a:xfrm>
             <a:off x="5715000" y="3657600"/>
-            <a:ext cx="3107520" cy="254520"/>
+            <a:ext cx="3107160" cy="254160"/>
           </a:xfrm>
           <a:prstGeom prst="rect">
             <a:avLst/>
@@ -14890,7 +14842,7 @@
         <p:spPr>
           <a:xfrm>
             <a:off x="5715000" y="3913560"/>
-            <a:ext cx="3107520" cy="455760"/>
+            <a:ext cx="3107160" cy="455400"/>
           </a:xfrm>
           <a:prstGeom prst="rect">
             <a:avLst/>
@@ -14945,7 +14897,7 @@
         <p:spPr>
           <a:xfrm>
             <a:off x="5715000" y="4434840"/>
-            <a:ext cx="3107520" cy="254520"/>
+            <a:ext cx="3107160" cy="254160"/>
           </a:xfrm>
           <a:prstGeom prst="rect">
             <a:avLst/>
@@ -15000,7 +14952,7 @@
         <p:spPr>
           <a:xfrm>
             <a:off x="5715000" y="4690800"/>
-            <a:ext cx="3107520" cy="455760"/>
+            <a:ext cx="3107160" cy="455400"/>
           </a:xfrm>
           <a:prstGeom prst="rect">
             <a:avLst/>
@@ -15092,7 +15044,7 @@
         <p:spPr>
           <a:xfrm>
             <a:off x="0" y="0"/>
-            <a:ext cx="62640" cy="5142240"/>
+            <a:ext cx="62280" cy="5141880"/>
           </a:xfrm>
           <a:prstGeom prst="rect">
             <a:avLst/>
@@ -15123,7 +15075,7 @@
         <p:spPr>
           <a:xfrm>
             <a:off x="0" y="0"/>
-            <a:ext cx="9142560" cy="711720"/>
+            <a:ext cx="9142200" cy="711360"/>
           </a:xfrm>
           <a:prstGeom prst="rect">
             <a:avLst/>
@@ -15154,7 +15106,7 @@
         <p:spPr>
           <a:xfrm>
             <a:off x="182880" y="0"/>
-            <a:ext cx="7130880" cy="711720"/>
+            <a:ext cx="7130520" cy="711360"/>
           </a:xfrm>
           <a:prstGeom prst="rect">
             <a:avLst/>
@@ -15209,7 +15161,7 @@
         <p:spPr>
           <a:xfrm>
             <a:off x="7589520" y="109800"/>
-            <a:ext cx="1370160" cy="474120"/>
+            <a:ext cx="1369800" cy="473760"/>
           </a:xfrm>
           <a:prstGeom prst="rect">
             <a:avLst/>
@@ -15247,7 +15199,7 @@
         <p:spPr>
           <a:xfrm>
             <a:off x="7589520" y="109800"/>
-            <a:ext cx="1370160" cy="474120"/>
+            <a:ext cx="1369800" cy="473760"/>
           </a:xfrm>
           <a:prstGeom prst="rect">
             <a:avLst/>
@@ -15302,7 +15254,7 @@
         <p:spPr>
           <a:xfrm>
             <a:off x="182880" y="804600"/>
-            <a:ext cx="5302080" cy="4067640"/>
+            <a:ext cx="5301720" cy="4067280"/>
           </a:xfrm>
           <a:prstGeom prst="rect">
             <a:avLst/>
@@ -15340,7 +15292,7 @@
         <p:spPr>
           <a:xfrm>
             <a:off x="182880" y="804600"/>
-            <a:ext cx="5302080" cy="254520"/>
+            <a:ext cx="5301720" cy="254160"/>
           </a:xfrm>
           <a:prstGeom prst="rect">
             <a:avLst/>
@@ -15371,7 +15323,7 @@
         <p:spPr>
           <a:xfrm>
             <a:off x="292680" y="868680"/>
-            <a:ext cx="108360" cy="108360"/>
+            <a:ext cx="108000" cy="108000"/>
           </a:xfrm>
           <a:prstGeom prst="ellipse">
             <a:avLst/>
@@ -15402,7 +15354,7 @@
         <p:spPr>
           <a:xfrm>
             <a:off x="475560" y="868680"/>
-            <a:ext cx="108360" cy="108360"/>
+            <a:ext cx="108000" cy="108000"/>
           </a:xfrm>
           <a:prstGeom prst="ellipse">
             <a:avLst/>
@@ -15433,7 +15385,7 @@
         <p:spPr>
           <a:xfrm>
             <a:off x="658440" y="868680"/>
-            <a:ext cx="108360" cy="108360"/>
+            <a:ext cx="108000" cy="108000"/>
           </a:xfrm>
           <a:prstGeom prst="ellipse">
             <a:avLst/>
@@ -15464,7 +15416,7 @@
         <p:spPr>
           <a:xfrm>
             <a:off x="182880" y="822960"/>
-            <a:ext cx="5210640" cy="199800"/>
+            <a:ext cx="5210280" cy="199440"/>
           </a:xfrm>
           <a:prstGeom prst="rect">
             <a:avLst/>
@@ -15519,7 +15471,7 @@
         <p:spPr>
           <a:xfrm>
             <a:off x="292680" y="1078920"/>
-            <a:ext cx="5073480" cy="3720240"/>
+            <a:ext cx="5073120" cy="3719880"/>
           </a:xfrm>
           <a:prstGeom prst="rect">
             <a:avLst/>
@@ -16346,7 +16298,7 @@
         <p:spPr>
           <a:xfrm>
             <a:off x="5669280" y="804600"/>
-            <a:ext cx="3290400" cy="4067640"/>
+            <a:ext cx="3290040" cy="4067280"/>
           </a:xfrm>
           <a:prstGeom prst="rect">
             <a:avLst/>
@@ -16384,7 +16336,7 @@
         <p:spPr>
           <a:xfrm>
             <a:off x="5806440" y="896040"/>
-            <a:ext cx="3016080" cy="364320"/>
+            <a:ext cx="3015720" cy="363960"/>
           </a:xfrm>
           <a:prstGeom prst="rect">
             <a:avLst/>
@@ -16439,7 +16391,7 @@
         <p:spPr>
           <a:xfrm>
             <a:off x="5806440" y="1371600"/>
-            <a:ext cx="3016080" cy="254520"/>
+            <a:ext cx="3015720" cy="254160"/>
           </a:xfrm>
           <a:prstGeom prst="rect">
             <a:avLst/>
@@ -16494,7 +16446,7 @@
         <p:spPr>
           <a:xfrm>
             <a:off x="5806440" y="1627560"/>
-            <a:ext cx="3016080" cy="592920"/>
+            <a:ext cx="3015720" cy="592560"/>
           </a:xfrm>
           <a:prstGeom prst="rect">
             <a:avLst/>
@@ -16549,7 +16501,7 @@
         <p:spPr>
           <a:xfrm>
             <a:off x="5806440" y="2331720"/>
-            <a:ext cx="3016080" cy="254520"/>
+            <a:ext cx="3015720" cy="254160"/>
           </a:xfrm>
           <a:prstGeom prst="rect">
             <a:avLst/>
@@ -16604,7 +16556,7 @@
         <p:spPr>
           <a:xfrm>
             <a:off x="5806440" y="2587680"/>
-            <a:ext cx="3016080" cy="592920"/>
+            <a:ext cx="3015720" cy="592560"/>
           </a:xfrm>
           <a:prstGeom prst="rect">
             <a:avLst/>
@@ -16659,7 +16611,7 @@
         <p:spPr>
           <a:xfrm>
             <a:off x="5806440" y="3291840"/>
-            <a:ext cx="3016080" cy="254520"/>
+            <a:ext cx="3015720" cy="254160"/>
           </a:xfrm>
           <a:prstGeom prst="rect">
             <a:avLst/>
@@ -16714,7 +16666,7 @@
         <p:spPr>
           <a:xfrm>
             <a:off x="5806440" y="3547800"/>
-            <a:ext cx="3016080" cy="592920"/>
+            <a:ext cx="3015720" cy="592560"/>
           </a:xfrm>
           <a:prstGeom prst="rect">
             <a:avLst/>
@@ -16769,7 +16721,7 @@
         <p:spPr>
           <a:xfrm>
             <a:off x="5806440" y="4251960"/>
-            <a:ext cx="3016080" cy="254520"/>
+            <a:ext cx="3015720" cy="254160"/>
           </a:xfrm>
           <a:prstGeom prst="rect">
             <a:avLst/>
@@ -16824,7 +16776,7 @@
         <p:spPr>
           <a:xfrm>
             <a:off x="5806440" y="4507920"/>
-            <a:ext cx="3016080" cy="592920"/>
+            <a:ext cx="3015720" cy="592560"/>
           </a:xfrm>
           <a:prstGeom prst="rect">
             <a:avLst/>
@@ -16916,7 +16868,7 @@
         <p:spPr>
           <a:xfrm>
             <a:off x="0" y="0"/>
-            <a:ext cx="9142560" cy="5142240"/>
+            <a:ext cx="9142200" cy="5141880"/>
           </a:xfrm>
           <a:prstGeom prst="rect">
             <a:avLst/>
@@ -16949,7 +16901,7 @@
         <p:spPr>
           <a:xfrm>
             <a:off x="274320" y="457200"/>
-            <a:ext cx="2284560" cy="2741760"/>
+            <a:ext cx="2284200" cy="2741400"/>
           </a:xfrm>
           <a:prstGeom prst="rect">
             <a:avLst/>
@@ -17006,7 +16958,7 @@
         <p:spPr>
           <a:xfrm>
             <a:off x="1005840" y="1645920"/>
-            <a:ext cx="7130880" cy="53280"/>
+            <a:ext cx="7130520" cy="52920"/>
           </a:xfrm>
           <a:prstGeom prst="rect">
             <a:avLst/>
@@ -17037,7 +16989,7 @@
         <p:spPr>
           <a:xfrm>
             <a:off x="1005840" y="1783080"/>
-            <a:ext cx="7770960" cy="1370160"/>
+            <a:ext cx="7770600" cy="1369800"/>
           </a:xfrm>
           <a:prstGeom prst="rect">
             <a:avLst/>
@@ -17092,7 +17044,7 @@
         <p:spPr>
           <a:xfrm>
             <a:off x="1005840" y="3200400"/>
-            <a:ext cx="7770960" cy="821520"/>
+            <a:ext cx="7770600" cy="821160"/>
           </a:xfrm>
           <a:prstGeom prst="rect">
             <a:avLst/>
@@ -17184,7 +17136,7 @@
         <p:spPr>
           <a:xfrm>
             <a:off x="0" y="0"/>
-            <a:ext cx="62640" cy="5142240"/>
+            <a:ext cx="62280" cy="5141880"/>
           </a:xfrm>
           <a:prstGeom prst="rect">
             <a:avLst/>
@@ -17215,7 +17167,7 @@
         <p:spPr>
           <a:xfrm>
             <a:off x="0" y="0"/>
-            <a:ext cx="9142560" cy="711720"/>
+            <a:ext cx="9142200" cy="711360"/>
           </a:xfrm>
           <a:prstGeom prst="rect">
             <a:avLst/>
@@ -17246,7 +17198,7 @@
         <p:spPr>
           <a:xfrm>
             <a:off x="182880" y="0"/>
-            <a:ext cx="7130880" cy="711720"/>
+            <a:ext cx="7130520" cy="711360"/>
           </a:xfrm>
           <a:prstGeom prst="rect">
             <a:avLst/>
@@ -17301,7 +17253,7 @@
         <p:spPr>
           <a:xfrm>
             <a:off x="7589520" y="109800"/>
-            <a:ext cx="1370160" cy="474120"/>
+            <a:ext cx="1369800" cy="473760"/>
           </a:xfrm>
           <a:prstGeom prst="rect">
             <a:avLst/>
@@ -17339,7 +17291,7 @@
         <p:spPr>
           <a:xfrm>
             <a:off x="7589520" y="109800"/>
-            <a:ext cx="1370160" cy="474120"/>
+            <a:ext cx="1369800" cy="473760"/>
           </a:xfrm>
           <a:prstGeom prst="rect">
             <a:avLst/>
@@ -17394,7 +17346,7 @@
         <p:spPr>
           <a:xfrm>
             <a:off x="182880" y="804600"/>
-            <a:ext cx="4204800" cy="4021920"/>
+            <a:ext cx="4204440" cy="4021560"/>
           </a:xfrm>
           <a:prstGeom prst="rect">
             <a:avLst/>
@@ -17432,7 +17384,7 @@
         <p:spPr>
           <a:xfrm>
             <a:off x="182880" y="804600"/>
-            <a:ext cx="4204800" cy="53280"/>
+            <a:ext cx="4204440" cy="52920"/>
           </a:xfrm>
           <a:prstGeom prst="rect">
             <a:avLst/>
@@ -17463,7 +17415,7 @@
         <p:spPr>
           <a:xfrm>
             <a:off x="320040" y="896040"/>
-            <a:ext cx="3930480" cy="272880"/>
+            <a:ext cx="3930120" cy="272520"/>
           </a:xfrm>
           <a:prstGeom prst="rect">
             <a:avLst/>
@@ -17494,7 +17446,7 @@
               </a:tabLst>
             </a:pPr>
             <a:r>
-              <a:rPr b="1" lang="en-US" sz="1100" spc="191" strike="noStrike">
+              <a:rPr b="1" lang="en-US" sz="1100" spc="188" strike="noStrike">
                 <a:solidFill>
                   <a:srgbClr val="f87171"/>
                 </a:solidFill>
@@ -17518,7 +17470,7 @@
         <p:spPr>
           <a:xfrm>
             <a:off x="320040" y="1207080"/>
-            <a:ext cx="3930480" cy="547200"/>
+            <a:ext cx="3930120" cy="546840"/>
           </a:xfrm>
           <a:prstGeom prst="rect">
             <a:avLst/>
@@ -17573,7 +17525,7 @@
         <p:spPr>
           <a:xfrm>
             <a:off x="320040" y="1828800"/>
-            <a:ext cx="3930480" cy="2604600"/>
+            <a:ext cx="3930120" cy="2604240"/>
           </a:xfrm>
           <a:prstGeom prst="rect">
             <a:avLst/>
@@ -17604,7 +17556,7 @@
         <p:spPr>
           <a:xfrm>
             <a:off x="429840" y="1883520"/>
-            <a:ext cx="3747600" cy="2494800"/>
+            <a:ext cx="3747240" cy="2494440"/>
           </a:xfrm>
           <a:prstGeom prst="rect">
             <a:avLst/>
@@ -17887,7 +17839,7 @@
         <p:spPr>
           <a:xfrm>
             <a:off x="320040" y="1828800"/>
-            <a:ext cx="3930480" cy="227160"/>
+            <a:ext cx="3930120" cy="226800"/>
           </a:xfrm>
           <a:prstGeom prst="rect">
             <a:avLst/>
@@ -17918,7 +17870,7 @@
         <p:spPr>
           <a:xfrm>
             <a:off x="429840" y="1874520"/>
-            <a:ext cx="99000" cy="99000"/>
+            <a:ext cx="98640" cy="98640"/>
           </a:xfrm>
           <a:prstGeom prst="ellipse">
             <a:avLst/>
@@ -17949,7 +17901,7 @@
         <p:spPr>
           <a:xfrm>
             <a:off x="612720" y="1874520"/>
-            <a:ext cx="99000" cy="99000"/>
+            <a:ext cx="98640" cy="98640"/>
           </a:xfrm>
           <a:prstGeom prst="ellipse">
             <a:avLst/>
@@ -17980,7 +17932,7 @@
         <p:spPr>
           <a:xfrm>
             <a:off x="795600" y="1874520"/>
-            <a:ext cx="99000" cy="99000"/>
+            <a:ext cx="98640" cy="98640"/>
           </a:xfrm>
           <a:prstGeom prst="ellipse">
             <a:avLst/>
@@ -18011,7 +17963,7 @@
         <p:spPr>
           <a:xfrm>
             <a:off x="4572000" y="804600"/>
-            <a:ext cx="4387680" cy="4021920"/>
+            <a:ext cx="4387320" cy="4021560"/>
           </a:xfrm>
           <a:prstGeom prst="rect">
             <a:avLst/>
@@ -18049,7 +18001,7 @@
         <p:spPr>
           <a:xfrm>
             <a:off x="4572000" y="804600"/>
-            <a:ext cx="4387680" cy="53280"/>
+            <a:ext cx="4387320" cy="52920"/>
           </a:xfrm>
           <a:prstGeom prst="rect">
             <a:avLst/>
@@ -18080,7 +18032,7 @@
         <p:spPr>
           <a:xfrm>
             <a:off x="4709160" y="896040"/>
-            <a:ext cx="4113360" cy="272880"/>
+            <a:ext cx="4113000" cy="272520"/>
           </a:xfrm>
           <a:prstGeom prst="rect">
             <a:avLst/>
@@ -18111,7 +18063,7 @@
               </a:tabLst>
             </a:pPr>
             <a:r>
-              <a:rPr b="1" lang="en-US" sz="1100" spc="89" strike="noStrike">
+              <a:rPr b="1" lang="en-US" sz="1100" spc="86" strike="noStrike">
                 <a:solidFill>
                   <a:srgbClr val="34d399"/>
                 </a:solidFill>
@@ -18135,7 +18087,7 @@
         <p:spPr>
           <a:xfrm>
             <a:off x="4709160" y="1207080"/>
-            <a:ext cx="4113360" cy="547200"/>
+            <a:ext cx="4113000" cy="546840"/>
           </a:xfrm>
           <a:prstGeom prst="rect">
             <a:avLst/>
@@ -18190,7 +18142,7 @@
         <p:spPr>
           <a:xfrm>
             <a:off x="4709160" y="1828800"/>
-            <a:ext cx="4113360" cy="2604600"/>
+            <a:ext cx="4113000" cy="2604240"/>
           </a:xfrm>
           <a:prstGeom prst="rect">
             <a:avLst/>
@@ -18221,7 +18173,7 @@
         <p:spPr>
           <a:xfrm>
             <a:off x="4709160" y="1828800"/>
-            <a:ext cx="4113360" cy="227160"/>
+            <a:ext cx="4113000" cy="226800"/>
           </a:xfrm>
           <a:prstGeom prst="rect">
             <a:avLst/>
@@ -18252,7 +18204,7 @@
         <p:spPr>
           <a:xfrm>
             <a:off x="4818960" y="1883520"/>
-            <a:ext cx="99000" cy="99000"/>
+            <a:ext cx="98640" cy="98640"/>
           </a:xfrm>
           <a:prstGeom prst="ellipse">
             <a:avLst/>
@@ -18283,7 +18235,7 @@
         <p:spPr>
           <a:xfrm>
             <a:off x="5001840" y="1883520"/>
-            <a:ext cx="99000" cy="99000"/>
+            <a:ext cx="98640" cy="98640"/>
           </a:xfrm>
           <a:prstGeom prst="ellipse">
             <a:avLst/>
@@ -18314,7 +18266,7 @@
         <p:spPr>
           <a:xfrm>
             <a:off x="5184720" y="1883520"/>
-            <a:ext cx="99000" cy="99000"/>
+            <a:ext cx="98640" cy="98640"/>
           </a:xfrm>
           <a:prstGeom prst="ellipse">
             <a:avLst/>
@@ -18345,7 +18297,7 @@
         <p:spPr>
           <a:xfrm>
             <a:off x="4818960" y="2084760"/>
-            <a:ext cx="3930480" cy="2302920"/>
+            <a:ext cx="3930120" cy="2302560"/>
           </a:xfrm>
           <a:prstGeom prst="rect">
             <a:avLst/>
@@ -18841,7 +18793,7 @@
         <p:spPr>
           <a:xfrm>
             <a:off x="0" y="0"/>
-            <a:ext cx="62640" cy="5142240"/>
+            <a:ext cx="62280" cy="5141880"/>
           </a:xfrm>
           <a:prstGeom prst="rect">
             <a:avLst/>
@@ -18872,7 +18824,7 @@
         <p:spPr>
           <a:xfrm>
             <a:off x="0" y="0"/>
-            <a:ext cx="9142560" cy="711720"/>
+            <a:ext cx="9142200" cy="711360"/>
           </a:xfrm>
           <a:prstGeom prst="rect">
             <a:avLst/>
@@ -18903,7 +18855,7 @@
         <p:spPr>
           <a:xfrm>
             <a:off x="182880" y="0"/>
-            <a:ext cx="7130880" cy="711720"/>
+            <a:ext cx="7130520" cy="711360"/>
           </a:xfrm>
           <a:prstGeom prst="rect">
             <a:avLst/>
@@ -18958,7 +18910,7 @@
         <p:spPr>
           <a:xfrm>
             <a:off x="7589520" y="109800"/>
-            <a:ext cx="1370160" cy="474120"/>
+            <a:ext cx="1369800" cy="473760"/>
           </a:xfrm>
           <a:prstGeom prst="rect">
             <a:avLst/>
@@ -18996,7 +18948,7 @@
         <p:spPr>
           <a:xfrm>
             <a:off x="7589520" y="109800"/>
-            <a:ext cx="1370160" cy="474120"/>
+            <a:ext cx="1369800" cy="473760"/>
           </a:xfrm>
           <a:prstGeom prst="rect">
             <a:avLst/>
@@ -20076,7 +20028,7 @@
         <p:spPr>
           <a:xfrm>
             <a:off x="182880" y="4462200"/>
-            <a:ext cx="4159080" cy="547200"/>
+            <a:ext cx="4158720" cy="546840"/>
           </a:xfrm>
           <a:prstGeom prst="rect">
             <a:avLst/>
@@ -20114,7 +20066,7 @@
         <p:spPr>
           <a:xfrm>
             <a:off x="320040" y="4526280"/>
-            <a:ext cx="3930480" cy="382680"/>
+            <a:ext cx="3930120" cy="382320"/>
           </a:xfrm>
           <a:prstGeom prst="rect">
             <a:avLst/>
@@ -20169,7 +20121,7 @@
         <p:spPr>
           <a:xfrm>
             <a:off x="4572000" y="4462200"/>
-            <a:ext cx="4387680" cy="547200"/>
+            <a:ext cx="4387320" cy="546840"/>
           </a:xfrm>
           <a:prstGeom prst="rect">
             <a:avLst/>
@@ -20207,7 +20159,7 @@
         <p:spPr>
           <a:xfrm>
             <a:off x="4709160" y="4526280"/>
-            <a:ext cx="4113360" cy="382680"/>
+            <a:ext cx="4113000" cy="382320"/>
           </a:xfrm>
           <a:prstGeom prst="rect">
             <a:avLst/>
@@ -20299,7 +20251,7 @@
         <p:spPr>
           <a:xfrm>
             <a:off x="0" y="0"/>
-            <a:ext cx="9142560" cy="5142240"/>
+            <a:ext cx="9142200" cy="5141880"/>
           </a:xfrm>
           <a:prstGeom prst="rect">
             <a:avLst/>
@@ -20332,7 +20284,7 @@
         <p:spPr>
           <a:xfrm>
             <a:off x="274320" y="457200"/>
-            <a:ext cx="2284560" cy="2741760"/>
+            <a:ext cx="2284200" cy="2741400"/>
           </a:xfrm>
           <a:prstGeom prst="rect">
             <a:avLst/>
@@ -20389,7 +20341,7 @@
         <p:spPr>
           <a:xfrm>
             <a:off x="1005840" y="1645920"/>
-            <a:ext cx="7130880" cy="53280"/>
+            <a:ext cx="7130520" cy="52920"/>
           </a:xfrm>
           <a:prstGeom prst="rect">
             <a:avLst/>
@@ -20420,7 +20372,7 @@
         <p:spPr>
           <a:xfrm>
             <a:off x="1005840" y="1783080"/>
-            <a:ext cx="7770960" cy="1370160"/>
+            <a:ext cx="7770600" cy="1369800"/>
           </a:xfrm>
           <a:prstGeom prst="rect">
             <a:avLst/>
@@ -20475,7 +20427,7 @@
         <p:spPr>
           <a:xfrm>
             <a:off x="1005840" y="3200400"/>
-            <a:ext cx="7770960" cy="821520"/>
+            <a:ext cx="7770600" cy="821160"/>
           </a:xfrm>
           <a:prstGeom prst="rect">
             <a:avLst/>

--- a/13.class_and_objects_4_and_6_mar/OOP_Python_PPTX_Part2.pptx
+++ b/13.class_and_objects_4_and_6_mar/OOP_Python_PPTX_Part2.pptx
@@ -304,7 +304,7 @@
             <a:pPr algn="r">
               <a:buNone/>
             </a:pPr>
-            <a:fld id="{FEE29BC8-7BA1-48F6-8B4E-B47893020AAF}" type="slidenum">
+            <a:fld id="{8FC5BF9A-0446-4976-B5F7-3CC05D2EBBB4}" type="slidenum">
               <a:rPr b="0" lang="en-IN" sz="1400" spc="-1" strike="noStrike">
                 <a:latin typeface="Times New Roman"/>
               </a:rPr>
@@ -352,7 +352,7 @@
         <p:spPr>
           <a:xfrm>
             <a:off x="685800" y="1143000"/>
-            <a:ext cx="5484600" cy="3084480"/>
+            <a:ext cx="5484240" cy="3084120"/>
           </a:xfrm>
           <a:prstGeom prst="rect">
             <a:avLst/>
@@ -375,7 +375,7 @@
         <p:spPr>
           <a:xfrm>
             <a:off x="685800" y="4400640"/>
-            <a:ext cx="5484600" cy="3598560"/>
+            <a:ext cx="5484240" cy="3598200"/>
           </a:xfrm>
           <a:prstGeom prst="rect">
             <a:avLst/>
@@ -409,7 +409,7 @@
         <p:spPr>
           <a:xfrm>
             <a:off x="3884760" y="8685360"/>
-            <a:ext cx="2970000" cy="456840"/>
+            <a:ext cx="2969640" cy="456480"/>
           </a:xfrm>
           <a:prstGeom prst="rect">
             <a:avLst/>
@@ -445,7 +445,7 @@
               </a:lnSpc>
               <a:buNone/>
             </a:pPr>
-            <a:fld id="{EF9E47F2-321D-4008-91D0-15CCD0AF99FF}" type="slidenum">
+            <a:fld id="{3A5D0A3F-41F2-4BF1-8BB9-B26C1DA135EE}" type="slidenum">
               <a:rPr b="0" lang="en-US" sz="1200" spc="-1" strike="noStrike">
                 <a:solidFill>
                   <a:srgbClr val="000000"/>
@@ -496,7 +496,7 @@
         <p:spPr>
           <a:xfrm>
             <a:off x="685800" y="1143000"/>
-            <a:ext cx="5484600" cy="3084480"/>
+            <a:ext cx="5484240" cy="3084120"/>
           </a:xfrm>
           <a:prstGeom prst="rect">
             <a:avLst/>
@@ -519,7 +519,7 @@
         <p:spPr>
           <a:xfrm>
             <a:off x="685800" y="4400640"/>
-            <a:ext cx="5484600" cy="3598560"/>
+            <a:ext cx="5484240" cy="3598200"/>
           </a:xfrm>
           <a:prstGeom prst="rect">
             <a:avLst/>
@@ -553,7 +553,7 @@
         <p:spPr>
           <a:xfrm>
             <a:off x="3884760" y="8685360"/>
-            <a:ext cx="2970000" cy="456840"/>
+            <a:ext cx="2969640" cy="456480"/>
           </a:xfrm>
           <a:prstGeom prst="rect">
             <a:avLst/>
@@ -589,7 +589,7 @@
               </a:lnSpc>
               <a:buNone/>
             </a:pPr>
-            <a:fld id="{435B535E-FA37-4A5C-A1C9-B737030A6F08}" type="slidenum">
+            <a:fld id="{D504DB42-17B8-46C8-8831-951ABA6B84C1}" type="slidenum">
               <a:rPr b="0" lang="en-US" sz="1200" spc="-1" strike="noStrike">
                 <a:solidFill>
                   <a:srgbClr val="000000"/>
@@ -640,7 +640,7 @@
         <p:spPr>
           <a:xfrm>
             <a:off x="685800" y="1143000"/>
-            <a:ext cx="5484600" cy="3084480"/>
+            <a:ext cx="5484240" cy="3084120"/>
           </a:xfrm>
           <a:prstGeom prst="rect">
             <a:avLst/>
@@ -663,7 +663,7 @@
         <p:spPr>
           <a:xfrm>
             <a:off x="685800" y="4400640"/>
-            <a:ext cx="5484600" cy="3598560"/>
+            <a:ext cx="5484240" cy="3598200"/>
           </a:xfrm>
           <a:prstGeom prst="rect">
             <a:avLst/>
@@ -697,7 +697,7 @@
         <p:spPr>
           <a:xfrm>
             <a:off x="3884760" y="8685360"/>
-            <a:ext cx="2970000" cy="456840"/>
+            <a:ext cx="2969640" cy="456480"/>
           </a:xfrm>
           <a:prstGeom prst="rect">
             <a:avLst/>
@@ -733,7 +733,7 @@
               </a:lnSpc>
               <a:buNone/>
             </a:pPr>
-            <a:fld id="{17152A13-1FD0-4C92-8E95-B6F3C6BBA214}" type="slidenum">
+            <a:fld id="{FCD90D81-348B-429B-9180-AD93FA65D711}" type="slidenum">
               <a:rPr b="0" lang="en-US" sz="1200" spc="-1" strike="noStrike">
                 <a:solidFill>
                   <a:srgbClr val="000000"/>
@@ -784,7 +784,7 @@
         <p:spPr>
           <a:xfrm>
             <a:off x="685800" y="1143000"/>
-            <a:ext cx="5484600" cy="3084480"/>
+            <a:ext cx="5484240" cy="3084120"/>
           </a:xfrm>
           <a:prstGeom prst="rect">
             <a:avLst/>
@@ -807,7 +807,7 @@
         <p:spPr>
           <a:xfrm>
             <a:off x="685800" y="4400640"/>
-            <a:ext cx="5484600" cy="3598560"/>
+            <a:ext cx="5484240" cy="3598200"/>
           </a:xfrm>
           <a:prstGeom prst="rect">
             <a:avLst/>
@@ -841,7 +841,7 @@
         <p:spPr>
           <a:xfrm>
             <a:off x="3884760" y="8685360"/>
-            <a:ext cx="2970000" cy="456840"/>
+            <a:ext cx="2969640" cy="456480"/>
           </a:xfrm>
           <a:prstGeom prst="rect">
             <a:avLst/>
@@ -877,7 +877,7 @@
               </a:lnSpc>
               <a:buNone/>
             </a:pPr>
-            <a:fld id="{1D44F3D3-DD0F-4987-94ED-1E04B45D451E}" type="slidenum">
+            <a:fld id="{106315C8-94ED-472C-93F0-E0B66F3571CC}" type="slidenum">
               <a:rPr b="0" lang="en-US" sz="1200" spc="-1" strike="noStrike">
                 <a:solidFill>
                   <a:srgbClr val="000000"/>
@@ -928,7 +928,7 @@
         <p:spPr>
           <a:xfrm>
             <a:off x="685800" y="1143000"/>
-            <a:ext cx="5484600" cy="3084480"/>
+            <a:ext cx="5484240" cy="3084120"/>
           </a:xfrm>
           <a:prstGeom prst="rect">
             <a:avLst/>
@@ -951,7 +951,7 @@
         <p:spPr>
           <a:xfrm>
             <a:off x="685800" y="4400640"/>
-            <a:ext cx="5484600" cy="3598560"/>
+            <a:ext cx="5484240" cy="3598200"/>
           </a:xfrm>
           <a:prstGeom prst="rect">
             <a:avLst/>
@@ -985,7 +985,7 @@
         <p:spPr>
           <a:xfrm>
             <a:off x="3884760" y="8685360"/>
-            <a:ext cx="2970000" cy="456840"/>
+            <a:ext cx="2969640" cy="456480"/>
           </a:xfrm>
           <a:prstGeom prst="rect">
             <a:avLst/>
@@ -1021,7 +1021,7 @@
               </a:lnSpc>
               <a:buNone/>
             </a:pPr>
-            <a:fld id="{8A2C74D8-5D50-4FA2-9DC9-C2FD4412368F}" type="slidenum">
+            <a:fld id="{D63A8025-048F-4966-A5C5-3A6F6A92955A}" type="slidenum">
               <a:rPr b="0" lang="en-US" sz="1200" spc="-1" strike="noStrike">
                 <a:solidFill>
                   <a:srgbClr val="000000"/>
@@ -1072,7 +1072,7 @@
         <p:spPr>
           <a:xfrm>
             <a:off x="685800" y="1143000"/>
-            <a:ext cx="5484600" cy="3084480"/>
+            <a:ext cx="5484240" cy="3084120"/>
           </a:xfrm>
           <a:prstGeom prst="rect">
             <a:avLst/>
@@ -1095,7 +1095,7 @@
         <p:spPr>
           <a:xfrm>
             <a:off x="685800" y="4400640"/>
-            <a:ext cx="5484600" cy="3598560"/>
+            <a:ext cx="5484240" cy="3598200"/>
           </a:xfrm>
           <a:prstGeom prst="rect">
             <a:avLst/>
@@ -1129,7 +1129,7 @@
         <p:spPr>
           <a:xfrm>
             <a:off x="3884760" y="8685360"/>
-            <a:ext cx="2970000" cy="456840"/>
+            <a:ext cx="2969640" cy="456480"/>
           </a:xfrm>
           <a:prstGeom prst="rect">
             <a:avLst/>
@@ -1165,7 +1165,7 @@
               </a:lnSpc>
               <a:buNone/>
             </a:pPr>
-            <a:fld id="{C8DE6346-28BF-4442-A1D2-DD3CEE8334A4}" type="slidenum">
+            <a:fld id="{006FC965-F02E-4281-B1F1-BA757A8F7270}" type="slidenum">
               <a:rPr b="0" lang="en-US" sz="1200" spc="-1" strike="noStrike">
                 <a:solidFill>
                   <a:srgbClr val="000000"/>
@@ -1216,7 +1216,7 @@
         <p:spPr>
           <a:xfrm>
             <a:off x="685800" y="1143000"/>
-            <a:ext cx="5484600" cy="3084480"/>
+            <a:ext cx="5484240" cy="3084120"/>
           </a:xfrm>
           <a:prstGeom prst="rect">
             <a:avLst/>
@@ -1239,7 +1239,7 @@
         <p:spPr>
           <a:xfrm>
             <a:off x="685800" y="4400640"/>
-            <a:ext cx="5484600" cy="3598560"/>
+            <a:ext cx="5484240" cy="3598200"/>
           </a:xfrm>
           <a:prstGeom prst="rect">
             <a:avLst/>
@@ -1273,7 +1273,7 @@
         <p:spPr>
           <a:xfrm>
             <a:off x="3884760" y="8685360"/>
-            <a:ext cx="2970000" cy="456840"/>
+            <a:ext cx="2969640" cy="456480"/>
           </a:xfrm>
           <a:prstGeom prst="rect">
             <a:avLst/>
@@ -1309,7 +1309,7 @@
               </a:lnSpc>
               <a:buNone/>
             </a:pPr>
-            <a:fld id="{79A0F318-12DD-4F52-8DC1-44EF2315F49E}" type="slidenum">
+            <a:fld id="{0AABD06D-E876-4B2D-8D0D-3BDD651E1E3D}" type="slidenum">
               <a:rPr b="0" lang="en-US" sz="1200" spc="-1" strike="noStrike">
                 <a:solidFill>
                   <a:srgbClr val="000000"/>
@@ -1360,7 +1360,7 @@
         <p:spPr>
           <a:xfrm>
             <a:off x="685800" y="1143000"/>
-            <a:ext cx="5484600" cy="3084480"/>
+            <a:ext cx="5484240" cy="3084120"/>
           </a:xfrm>
           <a:prstGeom prst="rect">
             <a:avLst/>
@@ -1383,7 +1383,7 @@
         <p:spPr>
           <a:xfrm>
             <a:off x="685800" y="4400640"/>
-            <a:ext cx="5484600" cy="3598560"/>
+            <a:ext cx="5484240" cy="3598200"/>
           </a:xfrm>
           <a:prstGeom prst="rect">
             <a:avLst/>
@@ -1417,7 +1417,7 @@
         <p:spPr>
           <a:xfrm>
             <a:off x="3884760" y="8685360"/>
-            <a:ext cx="2970000" cy="456840"/>
+            <a:ext cx="2969640" cy="456480"/>
           </a:xfrm>
           <a:prstGeom prst="rect">
             <a:avLst/>
@@ -1453,7 +1453,7 @@
               </a:lnSpc>
               <a:buNone/>
             </a:pPr>
-            <a:fld id="{251E2681-837C-4CEA-B4C3-3ECF389F8F01}" type="slidenum">
+            <a:fld id="{F52CB952-4C29-4C77-8DE8-39F11535CBC3}" type="slidenum">
               <a:rPr b="0" lang="en-US" sz="1200" spc="-1" strike="noStrike">
                 <a:solidFill>
                   <a:srgbClr val="000000"/>
@@ -1504,7 +1504,7 @@
         <p:spPr>
           <a:xfrm>
             <a:off x="685800" y="1143000"/>
-            <a:ext cx="5484600" cy="3084480"/>
+            <a:ext cx="5484240" cy="3084120"/>
           </a:xfrm>
           <a:prstGeom prst="rect">
             <a:avLst/>
@@ -1527,7 +1527,7 @@
         <p:spPr>
           <a:xfrm>
             <a:off x="685800" y="4400640"/>
-            <a:ext cx="5484600" cy="3598560"/>
+            <a:ext cx="5484240" cy="3598200"/>
           </a:xfrm>
           <a:prstGeom prst="rect">
             <a:avLst/>
@@ -1561,7 +1561,7 @@
         <p:spPr>
           <a:xfrm>
             <a:off x="3884760" y="8685360"/>
-            <a:ext cx="2970000" cy="456840"/>
+            <a:ext cx="2969640" cy="456480"/>
           </a:xfrm>
           <a:prstGeom prst="rect">
             <a:avLst/>
@@ -1597,7 +1597,7 @@
               </a:lnSpc>
               <a:buNone/>
             </a:pPr>
-            <a:fld id="{2217D8E5-E123-4739-B3B4-67D58A8CF5B5}" type="slidenum">
+            <a:fld id="{BAC1A1FD-2DC5-4135-998D-2E95921B84D2}" type="slidenum">
               <a:rPr b="0" lang="en-US" sz="1200" spc="-1" strike="noStrike">
                 <a:solidFill>
                   <a:srgbClr val="000000"/>
@@ -1648,7 +1648,7 @@
         <p:spPr>
           <a:xfrm>
             <a:off x="685800" y="1143000"/>
-            <a:ext cx="5484600" cy="3084480"/>
+            <a:ext cx="5484240" cy="3084120"/>
           </a:xfrm>
           <a:prstGeom prst="rect">
             <a:avLst/>
@@ -1671,7 +1671,7 @@
         <p:spPr>
           <a:xfrm>
             <a:off x="685800" y="4400640"/>
-            <a:ext cx="5484600" cy="3598560"/>
+            <a:ext cx="5484240" cy="3598200"/>
           </a:xfrm>
           <a:prstGeom prst="rect">
             <a:avLst/>
@@ -1705,7 +1705,7 @@
         <p:spPr>
           <a:xfrm>
             <a:off x="3884760" y="8685360"/>
-            <a:ext cx="2970000" cy="456840"/>
+            <a:ext cx="2969640" cy="456480"/>
           </a:xfrm>
           <a:prstGeom prst="rect">
             <a:avLst/>
@@ -1741,7 +1741,7 @@
               </a:lnSpc>
               <a:buNone/>
             </a:pPr>
-            <a:fld id="{E0912D0A-7B38-4688-9170-E4B71E06EDF8}" type="slidenum">
+            <a:fld id="{4A5D168A-6342-4B56-ACD8-B425994D0E2F}" type="slidenum">
               <a:rPr b="0" lang="en-US" sz="1200" spc="-1" strike="noStrike">
                 <a:solidFill>
                   <a:srgbClr val="000000"/>
@@ -1792,7 +1792,7 @@
         <p:spPr>
           <a:xfrm>
             <a:off x="685800" y="1143000"/>
-            <a:ext cx="5484600" cy="3084480"/>
+            <a:ext cx="5484240" cy="3084120"/>
           </a:xfrm>
           <a:prstGeom prst="rect">
             <a:avLst/>
@@ -1815,7 +1815,7 @@
         <p:spPr>
           <a:xfrm>
             <a:off x="685800" y="4400640"/>
-            <a:ext cx="5484600" cy="3598560"/>
+            <a:ext cx="5484240" cy="3598200"/>
           </a:xfrm>
           <a:prstGeom prst="rect">
             <a:avLst/>
@@ -1849,7 +1849,7 @@
         <p:spPr>
           <a:xfrm>
             <a:off x="3884760" y="8685360"/>
-            <a:ext cx="2970000" cy="456840"/>
+            <a:ext cx="2969640" cy="456480"/>
           </a:xfrm>
           <a:prstGeom prst="rect">
             <a:avLst/>
@@ -1885,7 +1885,7 @@
               </a:lnSpc>
               <a:buNone/>
             </a:pPr>
-            <a:fld id="{0FF4D9F9-F2F2-4657-A164-B5300E05F805}" type="slidenum">
+            <a:fld id="{768B3338-2094-4093-AC7A-14B88BB73614}" type="slidenum">
               <a:rPr b="0" lang="en-US" sz="1200" spc="-1" strike="noStrike">
                 <a:solidFill>
                   <a:srgbClr val="000000"/>
@@ -1936,7 +1936,7 @@
         <p:spPr>
           <a:xfrm>
             <a:off x="685800" y="1143000"/>
-            <a:ext cx="5484600" cy="3084480"/>
+            <a:ext cx="5484240" cy="3084120"/>
           </a:xfrm>
           <a:prstGeom prst="rect">
             <a:avLst/>
@@ -1959,7 +1959,7 @@
         <p:spPr>
           <a:xfrm>
             <a:off x="685800" y="4400640"/>
-            <a:ext cx="5484600" cy="3598560"/>
+            <a:ext cx="5484240" cy="3598200"/>
           </a:xfrm>
           <a:prstGeom prst="rect">
             <a:avLst/>
@@ -1993,7 +1993,7 @@
         <p:spPr>
           <a:xfrm>
             <a:off x="3884760" y="8685360"/>
-            <a:ext cx="2970000" cy="456840"/>
+            <a:ext cx="2969640" cy="456480"/>
           </a:xfrm>
           <a:prstGeom prst="rect">
             <a:avLst/>
@@ -2029,7 +2029,7 @@
               </a:lnSpc>
               <a:buNone/>
             </a:pPr>
-            <a:fld id="{42EB8983-D2B6-4CEA-AA89-73495D7F447F}" type="slidenum">
+            <a:fld id="{CE8AD101-C565-4B4C-8270-A6C02255CA94}" type="slidenum">
               <a:rPr b="0" lang="en-US" sz="1200" spc="-1" strike="noStrike">
                 <a:solidFill>
                   <a:srgbClr val="000000"/>
@@ -2080,7 +2080,7 @@
         <p:spPr>
           <a:xfrm>
             <a:off x="685800" y="1143000"/>
-            <a:ext cx="5484600" cy="3084480"/>
+            <a:ext cx="5484240" cy="3084120"/>
           </a:xfrm>
           <a:prstGeom prst="rect">
             <a:avLst/>
@@ -2103,7 +2103,7 @@
         <p:spPr>
           <a:xfrm>
             <a:off x="685800" y="4400640"/>
-            <a:ext cx="5484600" cy="3598560"/>
+            <a:ext cx="5484240" cy="3598200"/>
           </a:xfrm>
           <a:prstGeom prst="rect">
             <a:avLst/>
@@ -2137,7 +2137,7 @@
         <p:spPr>
           <a:xfrm>
             <a:off x="3884760" y="8685360"/>
-            <a:ext cx="2970000" cy="456840"/>
+            <a:ext cx="2969640" cy="456480"/>
           </a:xfrm>
           <a:prstGeom prst="rect">
             <a:avLst/>
@@ -2173,7 +2173,7 @@
               </a:lnSpc>
               <a:buNone/>
             </a:pPr>
-            <a:fld id="{AE0CFBFD-8CC2-4D23-B177-8756A23E701C}" type="slidenum">
+            <a:fld id="{077D446A-2A49-4E78-9C02-148C3A207F59}" type="slidenum">
               <a:rPr b="0" lang="en-US" sz="1200" spc="-1" strike="noStrike">
                 <a:solidFill>
                   <a:srgbClr val="000000"/>
@@ -4021,7 +4021,7 @@
         <p:spPr>
           <a:xfrm>
             <a:off x="0" y="0"/>
-            <a:ext cx="3472920" cy="5141880"/>
+            <a:ext cx="3472560" cy="5141520"/>
           </a:xfrm>
           <a:prstGeom prst="rect">
             <a:avLst/>
@@ -4052,7 +4052,7 @@
         <p:spPr>
           <a:xfrm>
             <a:off x="3474720" y="0"/>
-            <a:ext cx="52920" cy="5141880"/>
+            <a:ext cx="52560" cy="5141520"/>
           </a:xfrm>
           <a:prstGeom prst="rect">
             <a:avLst/>
@@ -4083,7 +4083,7 @@
         <p:spPr>
           <a:xfrm>
             <a:off x="457200" y="548640"/>
-            <a:ext cx="2375640" cy="2375640"/>
+            <a:ext cx="2375280" cy="2375280"/>
           </a:xfrm>
           <a:prstGeom prst="ellipse">
             <a:avLst/>
@@ -4114,7 +4114,7 @@
         <p:spPr>
           <a:xfrm>
             <a:off x="457200" y="548640"/>
-            <a:ext cx="2375640" cy="2375640"/>
+            <a:ext cx="2375280" cy="2375280"/>
           </a:xfrm>
           <a:prstGeom prst="rect">
             <a:avLst/>
@@ -4169,7 +4169,7 @@
         <p:spPr>
           <a:xfrm>
             <a:off x="274320" y="3108960"/>
-            <a:ext cx="2924280" cy="409680"/>
+            <a:ext cx="2923920" cy="409320"/>
           </a:xfrm>
           <a:prstGeom prst="rect">
             <a:avLst/>
@@ -4200,7 +4200,7 @@
               </a:tabLst>
             </a:pPr>
             <a:r>
-              <a:rPr b="1" lang="en-US" sz="1300" spc="386" strike="noStrike">
+              <a:rPr b="1" lang="en-US" sz="1300" spc="384" strike="noStrike">
                 <a:solidFill>
                   <a:srgbClr val="38bdf8"/>
                 </a:solidFill>
@@ -4224,7 +4224,7 @@
         <p:spPr>
           <a:xfrm>
             <a:off x="3749040" y="457200"/>
-            <a:ext cx="5210280" cy="1369800"/>
+            <a:ext cx="5209920" cy="1369440"/>
           </a:xfrm>
           <a:prstGeom prst="rect">
             <a:avLst/>
@@ -4303,7 +4303,7 @@
         <p:spPr>
           <a:xfrm>
             <a:off x="3749040" y="1874520"/>
-            <a:ext cx="5210280" cy="409680"/>
+            <a:ext cx="5209920" cy="409320"/>
           </a:xfrm>
           <a:prstGeom prst="rect">
             <a:avLst/>
@@ -4358,7 +4358,7 @@
         <p:spPr>
           <a:xfrm>
             <a:off x="3749040" y="2377440"/>
-            <a:ext cx="5210280" cy="34920"/>
+            <a:ext cx="5209920" cy="34560"/>
           </a:xfrm>
           <a:prstGeom prst="rect">
             <a:avLst/>
@@ -4389,7 +4389,7 @@
         <p:spPr>
           <a:xfrm>
             <a:off x="3749040" y="2560320"/>
-            <a:ext cx="5210280" cy="2192760"/>
+            <a:ext cx="5209920" cy="2192400"/>
           </a:xfrm>
           <a:prstGeom prst="rect">
             <a:avLst/>
@@ -4582,7 +4582,7 @@
         <p:spPr>
           <a:xfrm>
             <a:off x="0" y="0"/>
-            <a:ext cx="62280" cy="5141880"/>
+            <a:ext cx="61920" cy="5141520"/>
           </a:xfrm>
           <a:prstGeom prst="rect">
             <a:avLst/>
@@ -4613,7 +4613,7 @@
         <p:spPr>
           <a:xfrm>
             <a:off x="0" y="0"/>
-            <a:ext cx="9142200" cy="711360"/>
+            <a:ext cx="9141840" cy="711000"/>
           </a:xfrm>
           <a:prstGeom prst="rect">
             <a:avLst/>
@@ -4644,7 +4644,7 @@
         <p:spPr>
           <a:xfrm>
             <a:off x="182880" y="0"/>
-            <a:ext cx="7130520" cy="711360"/>
+            <a:ext cx="7130160" cy="711000"/>
           </a:xfrm>
           <a:prstGeom prst="rect">
             <a:avLst/>
@@ -4699,7 +4699,7 @@
         <p:spPr>
           <a:xfrm>
             <a:off x="7589520" y="109800"/>
-            <a:ext cx="1369800" cy="473760"/>
+            <a:ext cx="1369440" cy="473400"/>
           </a:xfrm>
           <a:prstGeom prst="rect">
             <a:avLst/>
@@ -4737,7 +4737,7 @@
         <p:spPr>
           <a:xfrm>
             <a:off x="7589520" y="109800"/>
-            <a:ext cx="1369800" cy="473760"/>
+            <a:ext cx="1369440" cy="473400"/>
           </a:xfrm>
           <a:prstGeom prst="rect">
             <a:avLst/>
@@ -4792,7 +4792,7 @@
         <p:spPr>
           <a:xfrm>
             <a:off x="182880" y="804600"/>
-            <a:ext cx="2832840" cy="1077120"/>
+            <a:ext cx="2832480" cy="1076760"/>
           </a:xfrm>
           <a:prstGeom prst="rect">
             <a:avLst/>
@@ -4830,7 +4830,7 @@
         <p:spPr>
           <a:xfrm>
             <a:off x="182880" y="804600"/>
-            <a:ext cx="2832840" cy="52920"/>
+            <a:ext cx="2832480" cy="52560"/>
           </a:xfrm>
           <a:prstGeom prst="rect">
             <a:avLst/>
@@ -4861,7 +4861,7 @@
         <p:spPr>
           <a:xfrm>
             <a:off x="320040" y="896040"/>
-            <a:ext cx="2558520" cy="345600"/>
+            <a:ext cx="2558160" cy="345240"/>
           </a:xfrm>
           <a:prstGeom prst="rect">
             <a:avLst/>
@@ -4916,7 +4916,7 @@
         <p:spPr>
           <a:xfrm>
             <a:off x="320040" y="1261800"/>
-            <a:ext cx="2558520" cy="501120"/>
+            <a:ext cx="2558160" cy="500760"/>
           </a:xfrm>
           <a:prstGeom prst="rect">
             <a:avLst/>
@@ -4971,7 +4971,7 @@
         <p:spPr>
           <a:xfrm>
             <a:off x="3154680" y="804600"/>
-            <a:ext cx="2832840" cy="1077120"/>
+            <a:ext cx="2832480" cy="1076760"/>
           </a:xfrm>
           <a:prstGeom prst="rect">
             <a:avLst/>
@@ -5009,7 +5009,7 @@
         <p:spPr>
           <a:xfrm>
             <a:off x="3154680" y="804600"/>
-            <a:ext cx="2832840" cy="52920"/>
+            <a:ext cx="2832480" cy="52560"/>
           </a:xfrm>
           <a:prstGeom prst="rect">
             <a:avLst/>
@@ -5040,7 +5040,7 @@
         <p:spPr>
           <a:xfrm>
             <a:off x="3291840" y="896040"/>
-            <a:ext cx="2558520" cy="345600"/>
+            <a:ext cx="2558160" cy="345240"/>
           </a:xfrm>
           <a:prstGeom prst="rect">
             <a:avLst/>
@@ -5095,7 +5095,7 @@
         <p:spPr>
           <a:xfrm>
             <a:off x="3291840" y="1261800"/>
-            <a:ext cx="2558520" cy="501120"/>
+            <a:ext cx="2558160" cy="500760"/>
           </a:xfrm>
           <a:prstGeom prst="rect">
             <a:avLst/>
@@ -5150,7 +5150,7 @@
         <p:spPr>
           <a:xfrm>
             <a:off x="6126480" y="804600"/>
-            <a:ext cx="2832840" cy="1077120"/>
+            <a:ext cx="2832480" cy="1076760"/>
           </a:xfrm>
           <a:prstGeom prst="rect">
             <a:avLst/>
@@ -5188,7 +5188,7 @@
         <p:spPr>
           <a:xfrm>
             <a:off x="6126480" y="804600"/>
-            <a:ext cx="2832840" cy="52920"/>
+            <a:ext cx="2832480" cy="52560"/>
           </a:xfrm>
           <a:prstGeom prst="rect">
             <a:avLst/>
@@ -5219,7 +5219,7 @@
         <p:spPr>
           <a:xfrm>
             <a:off x="6263640" y="896040"/>
-            <a:ext cx="2558520" cy="345600"/>
+            <a:ext cx="2558160" cy="345240"/>
           </a:xfrm>
           <a:prstGeom prst="rect">
             <a:avLst/>
@@ -5274,7 +5274,7 @@
         <p:spPr>
           <a:xfrm>
             <a:off x="6263640" y="1261800"/>
-            <a:ext cx="2558520" cy="501120"/>
+            <a:ext cx="2558160" cy="500760"/>
           </a:xfrm>
           <a:prstGeom prst="rect">
             <a:avLst/>
@@ -5329,7 +5329,7 @@
         <p:spPr>
           <a:xfrm>
             <a:off x="-537120" y="1974960"/>
-            <a:ext cx="5576760" cy="4324680"/>
+            <a:ext cx="5576400" cy="4324320"/>
           </a:xfrm>
           <a:prstGeom prst="rect">
             <a:avLst/>
@@ -5367,7 +5367,7 @@
         <p:spPr>
           <a:xfrm>
             <a:off x="182880" y="1974960"/>
-            <a:ext cx="5667480" cy="254160"/>
+            <a:ext cx="5667120" cy="253800"/>
           </a:xfrm>
           <a:prstGeom prst="rect">
             <a:avLst/>
@@ -5398,7 +5398,7 @@
         <p:spPr>
           <a:xfrm>
             <a:off x="292680" y="2039040"/>
-            <a:ext cx="108000" cy="108000"/>
+            <a:ext cx="107640" cy="107640"/>
           </a:xfrm>
           <a:prstGeom prst="ellipse">
             <a:avLst/>
@@ -5429,7 +5429,7 @@
         <p:spPr>
           <a:xfrm>
             <a:off x="475560" y="2039040"/>
-            <a:ext cx="108000" cy="108000"/>
+            <a:ext cx="107640" cy="107640"/>
           </a:xfrm>
           <a:prstGeom prst="ellipse">
             <a:avLst/>
@@ -5460,7 +5460,7 @@
         <p:spPr>
           <a:xfrm>
             <a:off x="658440" y="2039040"/>
-            <a:ext cx="108000" cy="108000"/>
+            <a:ext cx="107640" cy="107640"/>
           </a:xfrm>
           <a:prstGeom prst="ellipse">
             <a:avLst/>
@@ -5491,7 +5491,7 @@
         <p:spPr>
           <a:xfrm>
             <a:off x="182880" y="1993320"/>
-            <a:ext cx="5576040" cy="199440"/>
+            <a:ext cx="5575680" cy="199080"/>
           </a:xfrm>
           <a:prstGeom prst="rect">
             <a:avLst/>
@@ -5546,7 +5546,7 @@
         <p:spPr>
           <a:xfrm>
             <a:off x="320760" y="2249280"/>
-            <a:ext cx="5438880" cy="2531160"/>
+            <a:ext cx="5438520" cy="2530800"/>
           </a:xfrm>
           <a:prstGeom prst="rect">
             <a:avLst/>
@@ -6356,7 +6356,7 @@
         <p:spPr>
           <a:xfrm>
             <a:off x="6035040" y="1974960"/>
-            <a:ext cx="2924280" cy="2878560"/>
+            <a:ext cx="2923920" cy="2878200"/>
           </a:xfrm>
           <a:prstGeom prst="rect">
             <a:avLst/>
@@ -6394,7 +6394,7 @@
         <p:spPr>
           <a:xfrm>
             <a:off x="6172200" y="2084760"/>
-            <a:ext cx="2649960" cy="592560"/>
+            <a:ext cx="2649600" cy="592200"/>
           </a:xfrm>
           <a:prstGeom prst="rect">
             <a:avLst/>
@@ -6473,7 +6473,7 @@
         <p:spPr>
           <a:xfrm>
             <a:off x="6172200" y="2743200"/>
-            <a:ext cx="2649960" cy="2009880"/>
+            <a:ext cx="2649600" cy="2009520"/>
           </a:xfrm>
           <a:prstGeom prst="rect">
             <a:avLst/>
@@ -6641,7 +6641,7 @@
         <p:spPr>
           <a:xfrm>
             <a:off x="0" y="0"/>
-            <a:ext cx="62280" cy="5141880"/>
+            <a:ext cx="61920" cy="5141520"/>
           </a:xfrm>
           <a:prstGeom prst="rect">
             <a:avLst/>
@@ -6672,7 +6672,7 @@
         <p:spPr>
           <a:xfrm>
             <a:off x="0" y="0"/>
-            <a:ext cx="9142200" cy="711360"/>
+            <a:ext cx="9141840" cy="711000"/>
           </a:xfrm>
           <a:prstGeom prst="rect">
             <a:avLst/>
@@ -6703,7 +6703,7 @@
         <p:spPr>
           <a:xfrm>
             <a:off x="182880" y="0"/>
-            <a:ext cx="7130520" cy="711360"/>
+            <a:ext cx="7130160" cy="711000"/>
           </a:xfrm>
           <a:prstGeom prst="rect">
             <a:avLst/>
@@ -6758,7 +6758,7 @@
         <p:spPr>
           <a:xfrm>
             <a:off x="7589520" y="109800"/>
-            <a:ext cx="1369800" cy="473760"/>
+            <a:ext cx="1369440" cy="473400"/>
           </a:xfrm>
           <a:prstGeom prst="rect">
             <a:avLst/>
@@ -6796,7 +6796,7 @@
         <p:spPr>
           <a:xfrm>
             <a:off x="7589520" y="109800"/>
-            <a:ext cx="1369800" cy="473760"/>
+            <a:ext cx="1369440" cy="473400"/>
           </a:xfrm>
           <a:prstGeom prst="rect">
             <a:avLst/>
@@ -6851,7 +6851,7 @@
         <p:spPr>
           <a:xfrm>
             <a:off x="182880" y="777240"/>
-            <a:ext cx="8776440" cy="345600"/>
+            <a:ext cx="8776080" cy="345240"/>
           </a:xfrm>
           <a:prstGeom prst="rect">
             <a:avLst/>
@@ -6906,7 +6906,7 @@
         <p:spPr>
           <a:xfrm>
             <a:off x="182880" y="1207080"/>
-            <a:ext cx="5035680" cy="4191480"/>
+            <a:ext cx="5035320" cy="4191120"/>
           </a:xfrm>
           <a:prstGeom prst="rect">
             <a:avLst/>
@@ -6944,7 +6944,7 @@
         <p:spPr>
           <a:xfrm>
             <a:off x="182880" y="1207080"/>
-            <a:ext cx="5027400" cy="254160"/>
+            <a:ext cx="5027040" cy="253800"/>
           </a:xfrm>
           <a:prstGeom prst="rect">
             <a:avLst/>
@@ -6975,7 +6975,7 @@
         <p:spPr>
           <a:xfrm>
             <a:off x="292680" y="1271160"/>
-            <a:ext cx="108000" cy="108000"/>
+            <a:ext cx="107640" cy="107640"/>
           </a:xfrm>
           <a:prstGeom prst="ellipse">
             <a:avLst/>
@@ -7006,7 +7006,7 @@
         <p:spPr>
           <a:xfrm>
             <a:off x="475560" y="1271160"/>
-            <a:ext cx="108000" cy="108000"/>
+            <a:ext cx="107640" cy="107640"/>
           </a:xfrm>
           <a:prstGeom prst="ellipse">
             <a:avLst/>
@@ -7037,7 +7037,7 @@
         <p:spPr>
           <a:xfrm>
             <a:off x="658440" y="1271160"/>
-            <a:ext cx="108000" cy="108000"/>
+            <a:ext cx="107640" cy="107640"/>
           </a:xfrm>
           <a:prstGeom prst="ellipse">
             <a:avLst/>
@@ -7068,7 +7068,7 @@
         <p:spPr>
           <a:xfrm>
             <a:off x="182880" y="1225440"/>
-            <a:ext cx="4935960" cy="199440"/>
+            <a:ext cx="4935600" cy="199080"/>
           </a:xfrm>
           <a:prstGeom prst="rect">
             <a:avLst/>
@@ -7123,7 +7123,7 @@
         <p:spPr>
           <a:xfrm>
             <a:off x="292680" y="1481400"/>
-            <a:ext cx="4798800" cy="3308400"/>
+            <a:ext cx="4798440" cy="3308040"/>
           </a:xfrm>
           <a:prstGeom prst="rect">
             <a:avLst/>
@@ -8102,7 +8102,7 @@
         <p:spPr>
           <a:xfrm>
             <a:off x="5394960" y="1207080"/>
-            <a:ext cx="3564360" cy="656640"/>
+            <a:ext cx="3564000" cy="656280"/>
           </a:xfrm>
           <a:prstGeom prst="rect">
             <a:avLst/>
@@ -8140,7 +8140,7 @@
         <p:spPr>
           <a:xfrm>
             <a:off x="5394960" y="1207080"/>
-            <a:ext cx="52920" cy="656640"/>
+            <a:ext cx="52560" cy="656280"/>
           </a:xfrm>
           <a:prstGeom prst="rect">
             <a:avLst/>
@@ -8171,7 +8171,7 @@
         <p:spPr>
           <a:xfrm>
             <a:off x="5541120" y="1252800"/>
-            <a:ext cx="3335760" cy="254160"/>
+            <a:ext cx="3335400" cy="253800"/>
           </a:xfrm>
           <a:prstGeom prst="rect">
             <a:avLst/>
@@ -8226,7 +8226,7 @@
         <p:spPr>
           <a:xfrm>
             <a:off x="5541120" y="1517760"/>
-            <a:ext cx="3335760" cy="254160"/>
+            <a:ext cx="3335400" cy="253800"/>
           </a:xfrm>
           <a:prstGeom prst="rect">
             <a:avLst/>
@@ -8281,7 +8281,7 @@
         <p:spPr>
           <a:xfrm>
             <a:off x="5394960" y="1938600"/>
-            <a:ext cx="3564360" cy="656640"/>
+            <a:ext cx="3564000" cy="656280"/>
           </a:xfrm>
           <a:prstGeom prst="rect">
             <a:avLst/>
@@ -8319,7 +8319,7 @@
         <p:spPr>
           <a:xfrm>
             <a:off x="5394960" y="1938600"/>
-            <a:ext cx="52920" cy="656640"/>
+            <a:ext cx="52560" cy="656280"/>
           </a:xfrm>
           <a:prstGeom prst="rect">
             <a:avLst/>
@@ -8350,7 +8350,7 @@
         <p:spPr>
           <a:xfrm>
             <a:off x="5541120" y="1984320"/>
-            <a:ext cx="3335760" cy="254160"/>
+            <a:ext cx="3335400" cy="253800"/>
           </a:xfrm>
           <a:prstGeom prst="rect">
             <a:avLst/>
@@ -8405,7 +8405,7 @@
         <p:spPr>
           <a:xfrm>
             <a:off x="5541120" y="2249280"/>
-            <a:ext cx="3335760" cy="254160"/>
+            <a:ext cx="3335400" cy="253800"/>
           </a:xfrm>
           <a:prstGeom prst="rect">
             <a:avLst/>
@@ -8460,7 +8460,7 @@
         <p:spPr>
           <a:xfrm>
             <a:off x="5394960" y="2670120"/>
-            <a:ext cx="3564360" cy="656640"/>
+            <a:ext cx="3564000" cy="656280"/>
           </a:xfrm>
           <a:prstGeom prst="rect">
             <a:avLst/>
@@ -8498,7 +8498,7 @@
         <p:spPr>
           <a:xfrm>
             <a:off x="5394960" y="2670120"/>
-            <a:ext cx="52920" cy="656640"/>
+            <a:ext cx="52560" cy="656280"/>
           </a:xfrm>
           <a:prstGeom prst="rect">
             <a:avLst/>
@@ -8529,7 +8529,7 @@
         <p:spPr>
           <a:xfrm>
             <a:off x="5541120" y="2715840"/>
-            <a:ext cx="3335760" cy="254160"/>
+            <a:ext cx="3335400" cy="253800"/>
           </a:xfrm>
           <a:prstGeom prst="rect">
             <a:avLst/>
@@ -8584,7 +8584,7 @@
         <p:spPr>
           <a:xfrm>
             <a:off x="5541120" y="2980800"/>
-            <a:ext cx="3335760" cy="254160"/>
+            <a:ext cx="3335400" cy="253800"/>
           </a:xfrm>
           <a:prstGeom prst="rect">
             <a:avLst/>
@@ -8639,7 +8639,7 @@
         <p:spPr>
           <a:xfrm>
             <a:off x="5394960" y="3401640"/>
-            <a:ext cx="3564360" cy="656640"/>
+            <a:ext cx="3564000" cy="656280"/>
           </a:xfrm>
           <a:prstGeom prst="rect">
             <a:avLst/>
@@ -8677,7 +8677,7 @@
         <p:spPr>
           <a:xfrm>
             <a:off x="5394960" y="3401640"/>
-            <a:ext cx="52920" cy="656640"/>
+            <a:ext cx="52560" cy="656280"/>
           </a:xfrm>
           <a:prstGeom prst="rect">
             <a:avLst/>
@@ -8708,7 +8708,7 @@
         <p:spPr>
           <a:xfrm>
             <a:off x="5541120" y="3447360"/>
-            <a:ext cx="3335760" cy="254160"/>
+            <a:ext cx="3335400" cy="253800"/>
           </a:xfrm>
           <a:prstGeom prst="rect">
             <a:avLst/>
@@ -8763,7 +8763,7 @@
         <p:spPr>
           <a:xfrm>
             <a:off x="5541120" y="3712320"/>
-            <a:ext cx="3335760" cy="254160"/>
+            <a:ext cx="3335400" cy="253800"/>
           </a:xfrm>
           <a:prstGeom prst="rect">
             <a:avLst/>
@@ -8818,7 +8818,7 @@
         <p:spPr>
           <a:xfrm>
             <a:off x="5394960" y="4133160"/>
-            <a:ext cx="3564360" cy="656640"/>
+            <a:ext cx="3564000" cy="656280"/>
           </a:xfrm>
           <a:prstGeom prst="rect">
             <a:avLst/>
@@ -8856,7 +8856,7 @@
         <p:spPr>
           <a:xfrm>
             <a:off x="5394960" y="4133160"/>
-            <a:ext cx="52920" cy="656640"/>
+            <a:ext cx="52560" cy="656280"/>
           </a:xfrm>
           <a:prstGeom prst="rect">
             <a:avLst/>
@@ -8887,7 +8887,7 @@
         <p:spPr>
           <a:xfrm>
             <a:off x="5541120" y="4178880"/>
-            <a:ext cx="3335760" cy="254160"/>
+            <a:ext cx="3335400" cy="253800"/>
           </a:xfrm>
           <a:prstGeom prst="rect">
             <a:avLst/>
@@ -8942,7 +8942,7 @@
         <p:spPr>
           <a:xfrm>
             <a:off x="5541120" y="4443840"/>
-            <a:ext cx="3335760" cy="254160"/>
+            <a:ext cx="3335400" cy="253800"/>
           </a:xfrm>
           <a:prstGeom prst="rect">
             <a:avLst/>
@@ -9034,7 +9034,7 @@
         <p:spPr>
           <a:xfrm>
             <a:off x="0" y="0"/>
-            <a:ext cx="62280" cy="5141880"/>
+            <a:ext cx="61920" cy="5141520"/>
           </a:xfrm>
           <a:prstGeom prst="rect">
             <a:avLst/>
@@ -9065,7 +9065,7 @@
         <p:spPr>
           <a:xfrm>
             <a:off x="0" y="0"/>
-            <a:ext cx="9142200" cy="711360"/>
+            <a:ext cx="9141840" cy="711000"/>
           </a:xfrm>
           <a:prstGeom prst="rect">
             <a:avLst/>
@@ -9096,7 +9096,7 @@
         <p:spPr>
           <a:xfrm>
             <a:off x="182880" y="0"/>
-            <a:ext cx="7130520" cy="711360"/>
+            <a:ext cx="7130160" cy="711000"/>
           </a:xfrm>
           <a:prstGeom prst="rect">
             <a:avLst/>
@@ -9151,7 +9151,7 @@
         <p:spPr>
           <a:xfrm>
             <a:off x="7589520" y="109800"/>
-            <a:ext cx="1369800" cy="473760"/>
+            <a:ext cx="1369440" cy="473400"/>
           </a:xfrm>
           <a:prstGeom prst="rect">
             <a:avLst/>
@@ -9189,7 +9189,7 @@
         <p:spPr>
           <a:xfrm>
             <a:off x="7589520" y="109800"/>
-            <a:ext cx="1369800" cy="473760"/>
+            <a:ext cx="1369440" cy="473400"/>
           </a:xfrm>
           <a:prstGeom prst="rect">
             <a:avLst/>
@@ -10436,7 +10436,7 @@
         <p:spPr>
           <a:xfrm>
             <a:off x="182880" y="4736520"/>
-            <a:ext cx="8776440" cy="290880"/>
+            <a:ext cx="8776080" cy="290520"/>
           </a:xfrm>
           <a:prstGeom prst="rect">
             <a:avLst/>
@@ -10467,7 +10467,7 @@
         <p:spPr>
           <a:xfrm>
             <a:off x="320040" y="4754880"/>
-            <a:ext cx="8502120" cy="254160"/>
+            <a:ext cx="8501760" cy="253800"/>
           </a:xfrm>
           <a:prstGeom prst="rect">
             <a:avLst/>
@@ -10559,7 +10559,7 @@
         <p:spPr>
           <a:xfrm>
             <a:off x="30240" y="-449640"/>
-            <a:ext cx="9142200" cy="5141880"/>
+            <a:ext cx="9141840" cy="5141520"/>
           </a:xfrm>
           <a:prstGeom prst="rect">
             <a:avLst/>
@@ -10590,7 +10590,7 @@
         <p:spPr>
           <a:xfrm>
             <a:off x="0" y="0"/>
-            <a:ext cx="62280" cy="5141880"/>
+            <a:ext cx="61920" cy="5141520"/>
           </a:xfrm>
           <a:prstGeom prst="rect">
             <a:avLst/>
@@ -10621,7 +10621,7 @@
         <p:spPr>
           <a:xfrm>
             <a:off x="914400" y="360000"/>
-            <a:ext cx="7313400" cy="363960"/>
+            <a:ext cx="7313040" cy="363600"/>
           </a:xfrm>
           <a:prstGeom prst="rect">
             <a:avLst/>
@@ -10652,7 +10652,7 @@
               </a:tabLst>
             </a:pPr>
             <a:r>
-              <a:rPr b="1" lang="en-US" sz="1300" spc="486" strike="noStrike">
+              <a:rPr b="1" lang="en-US" sz="1300" spc="483" strike="noStrike">
                 <a:solidFill>
                   <a:srgbClr val="34d399"/>
                 </a:solidFill>
@@ -10675,8 +10675,8 @@
         </p:nvSpPr>
         <p:spPr>
           <a:xfrm rot="21587400">
-            <a:off x="910800" y="779400"/>
-            <a:ext cx="7313400" cy="1004040"/>
+            <a:off x="910800" y="779040"/>
+            <a:ext cx="7313040" cy="1003680"/>
           </a:xfrm>
           <a:prstGeom prst="rect">
             <a:avLst/>
@@ -10731,7 +10731,7 @@
         <p:spPr>
           <a:xfrm>
             <a:off x="900000" y="2114640"/>
-            <a:ext cx="7313400" cy="43920"/>
+            <a:ext cx="7313040" cy="43560"/>
           </a:xfrm>
           <a:prstGeom prst="rect">
             <a:avLst/>
@@ -10762,7 +10762,7 @@
         <p:spPr>
           <a:xfrm>
             <a:off x="914400" y="2240280"/>
-            <a:ext cx="318240" cy="363960"/>
+            <a:ext cx="317880" cy="363600"/>
           </a:xfrm>
           <a:prstGeom prst="rect">
             <a:avLst/>
@@ -10817,7 +10817,7 @@
         <p:spPr>
           <a:xfrm>
             <a:off x="1298520" y="2240280"/>
-            <a:ext cx="2009880" cy="345600"/>
+            <a:ext cx="2009520" cy="345240"/>
           </a:xfrm>
           <a:prstGeom prst="rect">
             <a:avLst/>
@@ -10872,7 +10872,7 @@
         <p:spPr>
           <a:xfrm>
             <a:off x="3474720" y="2277000"/>
-            <a:ext cx="5027400" cy="345600"/>
+            <a:ext cx="5027040" cy="345240"/>
           </a:xfrm>
           <a:prstGeom prst="rect">
             <a:avLst/>
@@ -10927,7 +10927,7 @@
         <p:spPr>
           <a:xfrm>
             <a:off x="914400" y="3108960"/>
-            <a:ext cx="318240" cy="363960"/>
+            <a:ext cx="317880" cy="363600"/>
           </a:xfrm>
           <a:prstGeom prst="rect">
             <a:avLst/>
@@ -10982,7 +10982,7 @@
         <p:spPr>
           <a:xfrm>
             <a:off x="1298520" y="3108960"/>
-            <a:ext cx="2009880" cy="345600"/>
+            <a:ext cx="2009520" cy="345240"/>
           </a:xfrm>
           <a:prstGeom prst="rect">
             <a:avLst/>
@@ -11037,7 +11037,7 @@
         <p:spPr>
           <a:xfrm>
             <a:off x="3474720" y="3145680"/>
-            <a:ext cx="5027400" cy="345600"/>
+            <a:ext cx="5027040" cy="345240"/>
           </a:xfrm>
           <a:prstGeom prst="rect">
             <a:avLst/>
@@ -11092,7 +11092,7 @@
         <p:spPr>
           <a:xfrm>
             <a:off x="914400" y="3977640"/>
-            <a:ext cx="318240" cy="363960"/>
+            <a:ext cx="317880" cy="363600"/>
           </a:xfrm>
           <a:prstGeom prst="rect">
             <a:avLst/>
@@ -11147,7 +11147,7 @@
         <p:spPr>
           <a:xfrm>
             <a:off x="1298520" y="3977640"/>
-            <a:ext cx="2009880" cy="345600"/>
+            <a:ext cx="2009520" cy="345240"/>
           </a:xfrm>
           <a:prstGeom prst="rect">
             <a:avLst/>
@@ -11202,7 +11202,7 @@
         <p:spPr>
           <a:xfrm>
             <a:off x="3474720" y="4014360"/>
-            <a:ext cx="5027400" cy="345600"/>
+            <a:ext cx="5027040" cy="345240"/>
           </a:xfrm>
           <a:prstGeom prst="rect">
             <a:avLst/>
@@ -11257,7 +11257,7 @@
         <p:spPr>
           <a:xfrm>
             <a:off x="914400" y="4709160"/>
-            <a:ext cx="7770600" cy="272520"/>
+            <a:ext cx="7770240" cy="272160"/>
           </a:xfrm>
           <a:prstGeom prst="rect">
             <a:avLst/>
@@ -11349,7 +11349,7 @@
         <p:spPr>
           <a:xfrm>
             <a:off x="0" y="0"/>
-            <a:ext cx="62280" cy="5141880"/>
+            <a:ext cx="61920" cy="5141520"/>
           </a:xfrm>
           <a:prstGeom prst="rect">
             <a:avLst/>
@@ -11380,7 +11380,7 @@
         <p:spPr>
           <a:xfrm>
             <a:off x="0" y="0"/>
-            <a:ext cx="9142200" cy="711360"/>
+            <a:ext cx="9141840" cy="711000"/>
           </a:xfrm>
           <a:prstGeom prst="rect">
             <a:avLst/>
@@ -11411,7 +11411,7 @@
         <p:spPr>
           <a:xfrm>
             <a:off x="182880" y="0"/>
-            <a:ext cx="7130520" cy="711360"/>
+            <a:ext cx="7130160" cy="711000"/>
           </a:xfrm>
           <a:prstGeom prst="rect">
             <a:avLst/>
@@ -11466,7 +11466,7 @@
         <p:spPr>
           <a:xfrm>
             <a:off x="7589520" y="109800"/>
-            <a:ext cx="1369800" cy="473760"/>
+            <a:ext cx="1369440" cy="473400"/>
           </a:xfrm>
           <a:prstGeom prst="rect">
             <a:avLst/>
@@ -11504,7 +11504,7 @@
         <p:spPr>
           <a:xfrm>
             <a:off x="7589520" y="109800"/>
-            <a:ext cx="1369800" cy="473760"/>
+            <a:ext cx="1369440" cy="473400"/>
           </a:xfrm>
           <a:prstGeom prst="rect">
             <a:avLst/>
@@ -11559,7 +11559,7 @@
         <p:spPr>
           <a:xfrm>
             <a:off x="182880" y="804600"/>
-            <a:ext cx="8776440" cy="1278360"/>
+            <a:ext cx="8776080" cy="1278000"/>
           </a:xfrm>
           <a:prstGeom prst="rect">
             <a:avLst/>
@@ -11597,7 +11597,7 @@
         <p:spPr>
           <a:xfrm>
             <a:off x="182880" y="804600"/>
-            <a:ext cx="52920" cy="1278360"/>
+            <a:ext cx="52560" cy="1278000"/>
           </a:xfrm>
           <a:prstGeom prst="rect">
             <a:avLst/>
@@ -11628,7 +11628,7 @@
         <p:spPr>
           <a:xfrm>
             <a:off x="365760" y="896040"/>
-            <a:ext cx="2741400" cy="272520"/>
+            <a:ext cx="2741040" cy="272160"/>
           </a:xfrm>
           <a:prstGeom prst="rect">
             <a:avLst/>
@@ -11659,7 +11659,7 @@
               </a:tabLst>
             </a:pPr>
             <a:r>
-              <a:rPr b="1" lang="en-US" sz="1000" spc="188" strike="noStrike">
+              <a:rPr b="1" lang="en-US" sz="1000" spc="185" strike="noStrike">
                 <a:solidFill>
                   <a:srgbClr val="38bdf8"/>
                 </a:solidFill>
@@ -11683,7 +11683,7 @@
         <p:spPr>
           <a:xfrm>
             <a:off x="365760" y="1188720"/>
-            <a:ext cx="8319240" cy="546840"/>
+            <a:ext cx="8318880" cy="546480"/>
           </a:xfrm>
           <a:prstGeom prst="rect">
             <a:avLst/>
@@ -11738,7 +11738,7 @@
         <p:spPr>
           <a:xfrm>
             <a:off x="182880" y="2212920"/>
-            <a:ext cx="5118840" cy="2604240"/>
+            <a:ext cx="5118480" cy="2603880"/>
           </a:xfrm>
           <a:prstGeom prst="rect">
             <a:avLst/>
@@ -11776,7 +11776,7 @@
         <p:spPr>
           <a:xfrm>
             <a:off x="182880" y="2212920"/>
-            <a:ext cx="5118840" cy="254160"/>
+            <a:ext cx="5118480" cy="253800"/>
           </a:xfrm>
           <a:prstGeom prst="rect">
             <a:avLst/>
@@ -11807,7 +11807,7 @@
         <p:spPr>
           <a:xfrm>
             <a:off x="292680" y="2277000"/>
-            <a:ext cx="108000" cy="108000"/>
+            <a:ext cx="107640" cy="107640"/>
           </a:xfrm>
           <a:prstGeom prst="ellipse">
             <a:avLst/>
@@ -11838,7 +11838,7 @@
         <p:spPr>
           <a:xfrm>
             <a:off x="475560" y="2277000"/>
-            <a:ext cx="108000" cy="108000"/>
+            <a:ext cx="107640" cy="107640"/>
           </a:xfrm>
           <a:prstGeom prst="ellipse">
             <a:avLst/>
@@ -11869,7 +11869,7 @@
         <p:spPr>
           <a:xfrm>
             <a:off x="658440" y="2277000"/>
-            <a:ext cx="108000" cy="108000"/>
+            <a:ext cx="107640" cy="107640"/>
           </a:xfrm>
           <a:prstGeom prst="ellipse">
             <a:avLst/>
@@ -11900,7 +11900,7 @@
         <p:spPr>
           <a:xfrm>
             <a:off x="182880" y="2231280"/>
-            <a:ext cx="5027400" cy="199440"/>
+            <a:ext cx="5027040" cy="199080"/>
           </a:xfrm>
           <a:prstGeom prst="rect">
             <a:avLst/>
@@ -11955,7 +11955,7 @@
         <p:spPr>
           <a:xfrm>
             <a:off x="292680" y="2487240"/>
-            <a:ext cx="4890240" cy="2256840"/>
+            <a:ext cx="4889880" cy="2256480"/>
           </a:xfrm>
           <a:prstGeom prst="rect">
             <a:avLst/>
@@ -12381,7 +12381,7 @@
         <p:spPr>
           <a:xfrm>
             <a:off x="5486400" y="2212920"/>
-            <a:ext cx="3472920" cy="2604240"/>
+            <a:ext cx="3472560" cy="2603880"/>
           </a:xfrm>
           <a:prstGeom prst="rect">
             <a:avLst/>
@@ -12419,7 +12419,7 @@
         <p:spPr>
           <a:xfrm>
             <a:off x="5623560" y="2331720"/>
-            <a:ext cx="3198600" cy="363960"/>
+            <a:ext cx="3198240" cy="363600"/>
           </a:xfrm>
           <a:prstGeom prst="rect">
             <a:avLst/>
@@ -12474,7 +12474,7 @@
         <p:spPr>
           <a:xfrm>
             <a:off x="5623560" y="2788920"/>
-            <a:ext cx="3198600" cy="1918440"/>
+            <a:ext cx="3198240" cy="1918080"/>
           </a:xfrm>
           <a:prstGeom prst="rect">
             <a:avLst/>
@@ -12667,7 +12667,7 @@
         <p:spPr>
           <a:xfrm>
             <a:off x="0" y="0"/>
-            <a:ext cx="9142200" cy="5141880"/>
+            <a:ext cx="9141840" cy="5141520"/>
           </a:xfrm>
           <a:prstGeom prst="rect">
             <a:avLst/>
@@ -12700,7 +12700,7 @@
         <p:spPr>
           <a:xfrm>
             <a:off x="274320" y="457200"/>
-            <a:ext cx="2284200" cy="2741400"/>
+            <a:ext cx="2283840" cy="2741040"/>
           </a:xfrm>
           <a:prstGeom prst="rect">
             <a:avLst/>
@@ -12757,7 +12757,7 @@
         <p:spPr>
           <a:xfrm>
             <a:off x="1005840" y="1645920"/>
-            <a:ext cx="7130520" cy="52920"/>
+            <a:ext cx="7130160" cy="52560"/>
           </a:xfrm>
           <a:prstGeom prst="rect">
             <a:avLst/>
@@ -12788,7 +12788,7 @@
         <p:spPr>
           <a:xfrm>
             <a:off x="1005840" y="1783080"/>
-            <a:ext cx="7770600" cy="1369800"/>
+            <a:ext cx="7770240" cy="1369440"/>
           </a:xfrm>
           <a:prstGeom prst="rect">
             <a:avLst/>
@@ -12843,7 +12843,7 @@
         <p:spPr>
           <a:xfrm>
             <a:off x="1005840" y="3200400"/>
-            <a:ext cx="7770600" cy="821160"/>
+            <a:ext cx="7770240" cy="820800"/>
           </a:xfrm>
           <a:prstGeom prst="rect">
             <a:avLst/>
@@ -12935,7 +12935,7 @@
         <p:spPr>
           <a:xfrm>
             <a:off x="0" y="0"/>
-            <a:ext cx="62280" cy="5141880"/>
+            <a:ext cx="61920" cy="5141520"/>
           </a:xfrm>
           <a:prstGeom prst="rect">
             <a:avLst/>
@@ -12966,7 +12966,7 @@
         <p:spPr>
           <a:xfrm>
             <a:off x="0" y="0"/>
-            <a:ext cx="9142200" cy="711360"/>
+            <a:ext cx="9141840" cy="711000"/>
           </a:xfrm>
           <a:prstGeom prst="rect">
             <a:avLst/>
@@ -12997,7 +12997,7 @@
         <p:spPr>
           <a:xfrm>
             <a:off x="182880" y="0"/>
-            <a:ext cx="7130520" cy="711360"/>
+            <a:ext cx="7130160" cy="711000"/>
           </a:xfrm>
           <a:prstGeom prst="rect">
             <a:avLst/>
@@ -13052,7 +13052,7 @@
         <p:spPr>
           <a:xfrm>
             <a:off x="7589520" y="109800"/>
-            <a:ext cx="1369800" cy="473760"/>
+            <a:ext cx="1369440" cy="473400"/>
           </a:xfrm>
           <a:prstGeom prst="rect">
             <a:avLst/>
@@ -13090,7 +13090,7 @@
         <p:spPr>
           <a:xfrm>
             <a:off x="7589520" y="109800"/>
-            <a:ext cx="1369800" cy="473760"/>
+            <a:ext cx="1369440" cy="473400"/>
           </a:xfrm>
           <a:prstGeom prst="rect">
             <a:avLst/>
@@ -13145,7 +13145,7 @@
         <p:spPr>
           <a:xfrm>
             <a:off x="182880" y="804600"/>
-            <a:ext cx="5215680" cy="4593960"/>
+            <a:ext cx="5215320" cy="4593600"/>
           </a:xfrm>
           <a:prstGeom prst="rect">
             <a:avLst/>
@@ -13183,7 +13183,7 @@
         <p:spPr>
           <a:xfrm>
             <a:off x="182880" y="804600"/>
-            <a:ext cx="5210280" cy="254160"/>
+            <a:ext cx="5209920" cy="253800"/>
           </a:xfrm>
           <a:prstGeom prst="rect">
             <a:avLst/>
@@ -13214,7 +13214,7 @@
         <p:spPr>
           <a:xfrm>
             <a:off x="292680" y="868680"/>
-            <a:ext cx="108000" cy="108000"/>
+            <a:ext cx="107640" cy="107640"/>
           </a:xfrm>
           <a:prstGeom prst="ellipse">
             <a:avLst/>
@@ -13245,7 +13245,7 @@
         <p:spPr>
           <a:xfrm>
             <a:off x="475560" y="868680"/>
-            <a:ext cx="108000" cy="108000"/>
+            <a:ext cx="107640" cy="107640"/>
           </a:xfrm>
           <a:prstGeom prst="ellipse">
             <a:avLst/>
@@ -13276,7 +13276,7 @@
         <p:spPr>
           <a:xfrm>
             <a:off x="658440" y="868680"/>
-            <a:ext cx="108000" cy="108000"/>
+            <a:ext cx="107640" cy="107640"/>
           </a:xfrm>
           <a:prstGeom prst="ellipse">
             <a:avLst/>
@@ -13307,7 +13307,7 @@
         <p:spPr>
           <a:xfrm>
             <a:off x="182880" y="822960"/>
-            <a:ext cx="5118840" cy="199440"/>
+            <a:ext cx="5118480" cy="199080"/>
           </a:xfrm>
           <a:prstGeom prst="rect">
             <a:avLst/>
@@ -13362,7 +13362,7 @@
         <p:spPr>
           <a:xfrm>
             <a:off x="292680" y="1078920"/>
-            <a:ext cx="4981680" cy="3719880"/>
+            <a:ext cx="4981320" cy="3719520"/>
           </a:xfrm>
           <a:prstGeom prst="rect">
             <a:avLst/>
@@ -14364,7 +14364,7 @@
         <p:spPr>
           <a:xfrm>
             <a:off x="5577840" y="804600"/>
-            <a:ext cx="3420720" cy="4337640"/>
+            <a:ext cx="3420360" cy="4337280"/>
           </a:xfrm>
           <a:prstGeom prst="rect">
             <a:avLst/>
@@ -14402,7 +14402,7 @@
         <p:spPr>
           <a:xfrm>
             <a:off x="5715000" y="896040"/>
-            <a:ext cx="3107160" cy="345600"/>
+            <a:ext cx="3106800" cy="345240"/>
           </a:xfrm>
           <a:prstGeom prst="rect">
             <a:avLst/>
@@ -14457,7 +14457,7 @@
         <p:spPr>
           <a:xfrm>
             <a:off x="5715000" y="1325880"/>
-            <a:ext cx="3107160" cy="254160"/>
+            <a:ext cx="3106800" cy="253800"/>
           </a:xfrm>
           <a:prstGeom prst="rect">
             <a:avLst/>
@@ -14512,7 +14512,7 @@
         <p:spPr>
           <a:xfrm>
             <a:off x="5715000" y="1581840"/>
-            <a:ext cx="3107160" cy="455400"/>
+            <a:ext cx="3106800" cy="455040"/>
           </a:xfrm>
           <a:prstGeom prst="rect">
             <a:avLst/>
@@ -14567,7 +14567,7 @@
         <p:spPr>
           <a:xfrm>
             <a:off x="5715000" y="2103120"/>
-            <a:ext cx="3107160" cy="254160"/>
+            <a:ext cx="3106800" cy="253800"/>
           </a:xfrm>
           <a:prstGeom prst="rect">
             <a:avLst/>
@@ -14622,7 +14622,7 @@
         <p:spPr>
           <a:xfrm>
             <a:off x="5715000" y="2359080"/>
-            <a:ext cx="3107160" cy="455400"/>
+            <a:ext cx="3106800" cy="455040"/>
           </a:xfrm>
           <a:prstGeom prst="rect">
             <a:avLst/>
@@ -14677,7 +14677,7 @@
         <p:spPr>
           <a:xfrm>
             <a:off x="5715000" y="2880360"/>
-            <a:ext cx="3107160" cy="254160"/>
+            <a:ext cx="3106800" cy="253800"/>
           </a:xfrm>
           <a:prstGeom prst="rect">
             <a:avLst/>
@@ -14732,7 +14732,7 @@
         <p:spPr>
           <a:xfrm>
             <a:off x="5715000" y="3136320"/>
-            <a:ext cx="3107160" cy="455400"/>
+            <a:ext cx="3106800" cy="455040"/>
           </a:xfrm>
           <a:prstGeom prst="rect">
             <a:avLst/>
@@ -14787,7 +14787,7 @@
         <p:spPr>
           <a:xfrm>
             <a:off x="5715000" y="3657600"/>
-            <a:ext cx="3107160" cy="254160"/>
+            <a:ext cx="3106800" cy="253800"/>
           </a:xfrm>
           <a:prstGeom prst="rect">
             <a:avLst/>
@@ -14842,7 +14842,7 @@
         <p:spPr>
           <a:xfrm>
             <a:off x="5715000" y="3913560"/>
-            <a:ext cx="3107160" cy="455400"/>
+            <a:ext cx="3106800" cy="455040"/>
           </a:xfrm>
           <a:prstGeom prst="rect">
             <a:avLst/>
@@ -14897,7 +14897,7 @@
         <p:spPr>
           <a:xfrm>
             <a:off x="5715000" y="4434840"/>
-            <a:ext cx="3107160" cy="254160"/>
+            <a:ext cx="3106800" cy="253800"/>
           </a:xfrm>
           <a:prstGeom prst="rect">
             <a:avLst/>
@@ -14952,7 +14952,7 @@
         <p:spPr>
           <a:xfrm>
             <a:off x="5715000" y="4690800"/>
-            <a:ext cx="3107160" cy="455400"/>
+            <a:ext cx="3106800" cy="455040"/>
           </a:xfrm>
           <a:prstGeom prst="rect">
             <a:avLst/>
@@ -15044,7 +15044,7 @@
         <p:spPr>
           <a:xfrm>
             <a:off x="0" y="0"/>
-            <a:ext cx="62280" cy="5141880"/>
+            <a:ext cx="61920" cy="5141520"/>
           </a:xfrm>
           <a:prstGeom prst="rect">
             <a:avLst/>
@@ -15075,7 +15075,7 @@
         <p:spPr>
           <a:xfrm>
             <a:off x="0" y="0"/>
-            <a:ext cx="9142200" cy="711360"/>
+            <a:ext cx="9141840" cy="711000"/>
           </a:xfrm>
           <a:prstGeom prst="rect">
             <a:avLst/>
@@ -15106,7 +15106,7 @@
         <p:spPr>
           <a:xfrm>
             <a:off x="182880" y="0"/>
-            <a:ext cx="7130520" cy="711360"/>
+            <a:ext cx="7130160" cy="711000"/>
           </a:xfrm>
           <a:prstGeom prst="rect">
             <a:avLst/>
@@ -15161,7 +15161,7 @@
         <p:spPr>
           <a:xfrm>
             <a:off x="7589520" y="109800"/>
-            <a:ext cx="1369800" cy="473760"/>
+            <a:ext cx="1369440" cy="473400"/>
           </a:xfrm>
           <a:prstGeom prst="rect">
             <a:avLst/>
@@ -15199,7 +15199,7 @@
         <p:spPr>
           <a:xfrm>
             <a:off x="7589520" y="109800"/>
-            <a:ext cx="1369800" cy="473760"/>
+            <a:ext cx="1369440" cy="473400"/>
           </a:xfrm>
           <a:prstGeom prst="rect">
             <a:avLst/>
@@ -15254,7 +15254,7 @@
         <p:spPr>
           <a:xfrm>
             <a:off x="182880" y="804600"/>
-            <a:ext cx="5301720" cy="4067280"/>
+            <a:ext cx="5301360" cy="4066920"/>
           </a:xfrm>
           <a:prstGeom prst="rect">
             <a:avLst/>
@@ -15292,7 +15292,7 @@
         <p:spPr>
           <a:xfrm>
             <a:off x="182880" y="804600"/>
-            <a:ext cx="5301720" cy="254160"/>
+            <a:ext cx="5301360" cy="253800"/>
           </a:xfrm>
           <a:prstGeom prst="rect">
             <a:avLst/>
@@ -15323,7 +15323,7 @@
         <p:spPr>
           <a:xfrm>
             <a:off x="292680" y="868680"/>
-            <a:ext cx="108000" cy="108000"/>
+            <a:ext cx="107640" cy="107640"/>
           </a:xfrm>
           <a:prstGeom prst="ellipse">
             <a:avLst/>
@@ -15354,7 +15354,7 @@
         <p:spPr>
           <a:xfrm>
             <a:off x="475560" y="868680"/>
-            <a:ext cx="108000" cy="108000"/>
+            <a:ext cx="107640" cy="107640"/>
           </a:xfrm>
           <a:prstGeom prst="ellipse">
             <a:avLst/>
@@ -15385,7 +15385,7 @@
         <p:spPr>
           <a:xfrm>
             <a:off x="658440" y="868680"/>
-            <a:ext cx="108000" cy="108000"/>
+            <a:ext cx="107640" cy="107640"/>
           </a:xfrm>
           <a:prstGeom prst="ellipse">
             <a:avLst/>
@@ -15416,7 +15416,7 @@
         <p:spPr>
           <a:xfrm>
             <a:off x="182880" y="822960"/>
-            <a:ext cx="5210280" cy="199440"/>
+            <a:ext cx="5209920" cy="199080"/>
           </a:xfrm>
           <a:prstGeom prst="rect">
             <a:avLst/>
@@ -15471,7 +15471,7 @@
         <p:spPr>
           <a:xfrm>
             <a:off x="292680" y="1078920"/>
-            <a:ext cx="5073120" cy="3719880"/>
+            <a:ext cx="5072760" cy="3719520"/>
           </a:xfrm>
           <a:prstGeom prst="rect">
             <a:avLst/>
@@ -16298,7 +16298,7 @@
         <p:spPr>
           <a:xfrm>
             <a:off x="5669280" y="804600"/>
-            <a:ext cx="3290040" cy="4067280"/>
+            <a:ext cx="3289680" cy="4066920"/>
           </a:xfrm>
           <a:prstGeom prst="rect">
             <a:avLst/>
@@ -16336,7 +16336,7 @@
         <p:spPr>
           <a:xfrm>
             <a:off x="5806440" y="896040"/>
-            <a:ext cx="3015720" cy="363960"/>
+            <a:ext cx="3015360" cy="363600"/>
           </a:xfrm>
           <a:prstGeom prst="rect">
             <a:avLst/>
@@ -16391,7 +16391,7 @@
         <p:spPr>
           <a:xfrm>
             <a:off x="5806440" y="1371600"/>
-            <a:ext cx="3015720" cy="254160"/>
+            <a:ext cx="3015360" cy="253800"/>
           </a:xfrm>
           <a:prstGeom prst="rect">
             <a:avLst/>
@@ -16446,7 +16446,7 @@
         <p:spPr>
           <a:xfrm>
             <a:off x="5806440" y="1627560"/>
-            <a:ext cx="3015720" cy="592560"/>
+            <a:ext cx="3015360" cy="592200"/>
           </a:xfrm>
           <a:prstGeom prst="rect">
             <a:avLst/>
@@ -16501,7 +16501,7 @@
         <p:spPr>
           <a:xfrm>
             <a:off x="5806440" y="2331720"/>
-            <a:ext cx="3015720" cy="254160"/>
+            <a:ext cx="3015360" cy="253800"/>
           </a:xfrm>
           <a:prstGeom prst="rect">
             <a:avLst/>
@@ -16556,7 +16556,7 @@
         <p:spPr>
           <a:xfrm>
             <a:off x="5806440" y="2587680"/>
-            <a:ext cx="3015720" cy="592560"/>
+            <a:ext cx="3015360" cy="592200"/>
           </a:xfrm>
           <a:prstGeom prst="rect">
             <a:avLst/>
@@ -16611,7 +16611,7 @@
         <p:spPr>
           <a:xfrm>
             <a:off x="5806440" y="3291840"/>
-            <a:ext cx="3015720" cy="254160"/>
+            <a:ext cx="3015360" cy="253800"/>
           </a:xfrm>
           <a:prstGeom prst="rect">
             <a:avLst/>
@@ -16666,7 +16666,7 @@
         <p:spPr>
           <a:xfrm>
             <a:off x="5806440" y="3547800"/>
-            <a:ext cx="3015720" cy="592560"/>
+            <a:ext cx="3015360" cy="592200"/>
           </a:xfrm>
           <a:prstGeom prst="rect">
             <a:avLst/>
@@ -16721,7 +16721,7 @@
         <p:spPr>
           <a:xfrm>
             <a:off x="5806440" y="4251960"/>
-            <a:ext cx="3015720" cy="254160"/>
+            <a:ext cx="3015360" cy="253800"/>
           </a:xfrm>
           <a:prstGeom prst="rect">
             <a:avLst/>
@@ -16776,7 +16776,7 @@
         <p:spPr>
           <a:xfrm>
             <a:off x="5806440" y="4507920"/>
-            <a:ext cx="3015720" cy="592560"/>
+            <a:ext cx="3015360" cy="592200"/>
           </a:xfrm>
           <a:prstGeom prst="rect">
             <a:avLst/>
@@ -16868,7 +16868,7 @@
         <p:spPr>
           <a:xfrm>
             <a:off x="0" y="0"/>
-            <a:ext cx="9142200" cy="5141880"/>
+            <a:ext cx="9141840" cy="5141520"/>
           </a:xfrm>
           <a:prstGeom prst="rect">
             <a:avLst/>
@@ -16901,7 +16901,7 @@
         <p:spPr>
           <a:xfrm>
             <a:off x="274320" y="457200"/>
-            <a:ext cx="2284200" cy="2741400"/>
+            <a:ext cx="2283840" cy="2741040"/>
           </a:xfrm>
           <a:prstGeom prst="rect">
             <a:avLst/>
@@ -16958,7 +16958,7 @@
         <p:spPr>
           <a:xfrm>
             <a:off x="1005840" y="1645920"/>
-            <a:ext cx="7130520" cy="52920"/>
+            <a:ext cx="7130160" cy="52560"/>
           </a:xfrm>
           <a:prstGeom prst="rect">
             <a:avLst/>
@@ -16989,7 +16989,7 @@
         <p:spPr>
           <a:xfrm>
             <a:off x="1005840" y="1783080"/>
-            <a:ext cx="7770600" cy="1369800"/>
+            <a:ext cx="7770240" cy="1369440"/>
           </a:xfrm>
           <a:prstGeom prst="rect">
             <a:avLst/>
@@ -17044,7 +17044,7 @@
         <p:spPr>
           <a:xfrm>
             <a:off x="1005840" y="3200400"/>
-            <a:ext cx="7770600" cy="821160"/>
+            <a:ext cx="7770240" cy="820800"/>
           </a:xfrm>
           <a:prstGeom prst="rect">
             <a:avLst/>
@@ -17136,7 +17136,7 @@
         <p:spPr>
           <a:xfrm>
             <a:off x="0" y="0"/>
-            <a:ext cx="62280" cy="5141880"/>
+            <a:ext cx="61920" cy="5141520"/>
           </a:xfrm>
           <a:prstGeom prst="rect">
             <a:avLst/>
@@ -17167,7 +17167,7 @@
         <p:spPr>
           <a:xfrm>
             <a:off x="0" y="0"/>
-            <a:ext cx="9142200" cy="711360"/>
+            <a:ext cx="9141840" cy="711000"/>
           </a:xfrm>
           <a:prstGeom prst="rect">
             <a:avLst/>
@@ -17198,7 +17198,7 @@
         <p:spPr>
           <a:xfrm>
             <a:off x="182880" y="0"/>
-            <a:ext cx="7130520" cy="711360"/>
+            <a:ext cx="7130160" cy="711000"/>
           </a:xfrm>
           <a:prstGeom prst="rect">
             <a:avLst/>
@@ -17253,7 +17253,7 @@
         <p:spPr>
           <a:xfrm>
             <a:off x="7589520" y="109800"/>
-            <a:ext cx="1369800" cy="473760"/>
+            <a:ext cx="1369440" cy="473400"/>
           </a:xfrm>
           <a:prstGeom prst="rect">
             <a:avLst/>
@@ -17291,7 +17291,7 @@
         <p:spPr>
           <a:xfrm>
             <a:off x="7589520" y="109800"/>
-            <a:ext cx="1369800" cy="473760"/>
+            <a:ext cx="1369440" cy="473400"/>
           </a:xfrm>
           <a:prstGeom prst="rect">
             <a:avLst/>
@@ -17346,7 +17346,7 @@
         <p:spPr>
           <a:xfrm>
             <a:off x="182880" y="804600"/>
-            <a:ext cx="4204440" cy="4021560"/>
+            <a:ext cx="4204080" cy="4021200"/>
           </a:xfrm>
           <a:prstGeom prst="rect">
             <a:avLst/>
@@ -17384,7 +17384,7 @@
         <p:spPr>
           <a:xfrm>
             <a:off x="182880" y="804600"/>
-            <a:ext cx="4204440" cy="52920"/>
+            <a:ext cx="4204080" cy="52560"/>
           </a:xfrm>
           <a:prstGeom prst="rect">
             <a:avLst/>
@@ -17415,7 +17415,7 @@
         <p:spPr>
           <a:xfrm>
             <a:off x="320040" y="896040"/>
-            <a:ext cx="3930120" cy="272520"/>
+            <a:ext cx="3929760" cy="272160"/>
           </a:xfrm>
           <a:prstGeom prst="rect">
             <a:avLst/>
@@ -17446,7 +17446,7 @@
               </a:tabLst>
             </a:pPr>
             <a:r>
-              <a:rPr b="1" lang="en-US" sz="1100" spc="188" strike="noStrike">
+              <a:rPr b="1" lang="en-US" sz="1100" spc="185" strike="noStrike">
                 <a:solidFill>
                   <a:srgbClr val="f87171"/>
                 </a:solidFill>
@@ -17470,7 +17470,7 @@
         <p:spPr>
           <a:xfrm>
             <a:off x="320040" y="1207080"/>
-            <a:ext cx="3930120" cy="546840"/>
+            <a:ext cx="3929760" cy="546480"/>
           </a:xfrm>
           <a:prstGeom prst="rect">
             <a:avLst/>
@@ -17525,7 +17525,7 @@
         <p:spPr>
           <a:xfrm>
             <a:off x="320040" y="1828800"/>
-            <a:ext cx="3930120" cy="2604240"/>
+            <a:ext cx="3929760" cy="2603880"/>
           </a:xfrm>
           <a:prstGeom prst="rect">
             <a:avLst/>
@@ -17556,7 +17556,7 @@
         <p:spPr>
           <a:xfrm>
             <a:off x="429840" y="1883520"/>
-            <a:ext cx="3747240" cy="2494440"/>
+            <a:ext cx="3746880" cy="2494080"/>
           </a:xfrm>
           <a:prstGeom prst="rect">
             <a:avLst/>
@@ -17839,7 +17839,7 @@
         <p:spPr>
           <a:xfrm>
             <a:off x="320040" y="1828800"/>
-            <a:ext cx="3930120" cy="226800"/>
+            <a:ext cx="3929760" cy="226440"/>
           </a:xfrm>
           <a:prstGeom prst="rect">
             <a:avLst/>
@@ -17870,7 +17870,7 @@
         <p:spPr>
           <a:xfrm>
             <a:off x="429840" y="1874520"/>
-            <a:ext cx="98640" cy="98640"/>
+            <a:ext cx="98280" cy="98280"/>
           </a:xfrm>
           <a:prstGeom prst="ellipse">
             <a:avLst/>
@@ -17901,7 +17901,7 @@
         <p:spPr>
           <a:xfrm>
             <a:off x="612720" y="1874520"/>
-            <a:ext cx="98640" cy="98640"/>
+            <a:ext cx="98280" cy="98280"/>
           </a:xfrm>
           <a:prstGeom prst="ellipse">
             <a:avLst/>
@@ -17932,7 +17932,7 @@
         <p:spPr>
           <a:xfrm>
             <a:off x="795600" y="1874520"/>
-            <a:ext cx="98640" cy="98640"/>
+            <a:ext cx="98280" cy="98280"/>
           </a:xfrm>
           <a:prstGeom prst="ellipse">
             <a:avLst/>
@@ -17963,7 +17963,7 @@
         <p:spPr>
           <a:xfrm>
             <a:off x="4572000" y="804600"/>
-            <a:ext cx="4387320" cy="4021560"/>
+            <a:ext cx="4386960" cy="4021200"/>
           </a:xfrm>
           <a:prstGeom prst="rect">
             <a:avLst/>
@@ -18001,7 +18001,7 @@
         <p:spPr>
           <a:xfrm>
             <a:off x="4572000" y="804600"/>
-            <a:ext cx="4387320" cy="52920"/>
+            <a:ext cx="4386960" cy="52560"/>
           </a:xfrm>
           <a:prstGeom prst="rect">
             <a:avLst/>
@@ -18032,7 +18032,7 @@
         <p:spPr>
           <a:xfrm>
             <a:off x="4709160" y="896040"/>
-            <a:ext cx="4113000" cy="272520"/>
+            <a:ext cx="4112640" cy="272160"/>
           </a:xfrm>
           <a:prstGeom prst="rect">
             <a:avLst/>
@@ -18063,7 +18063,7 @@
               </a:tabLst>
             </a:pPr>
             <a:r>
-              <a:rPr b="1" lang="en-US" sz="1100" spc="86" strike="noStrike">
+              <a:rPr b="1" lang="en-US" sz="1100" spc="83" strike="noStrike">
                 <a:solidFill>
                   <a:srgbClr val="34d399"/>
                 </a:solidFill>
@@ -18087,7 +18087,7 @@
         <p:spPr>
           <a:xfrm>
             <a:off x="4709160" y="1207080"/>
-            <a:ext cx="4113000" cy="546840"/>
+            <a:ext cx="4112640" cy="546480"/>
           </a:xfrm>
           <a:prstGeom prst="rect">
             <a:avLst/>
@@ -18142,7 +18142,7 @@
         <p:spPr>
           <a:xfrm>
             <a:off x="4709160" y="1828800"/>
-            <a:ext cx="4113000" cy="2604240"/>
+            <a:ext cx="4112640" cy="2603880"/>
           </a:xfrm>
           <a:prstGeom prst="rect">
             <a:avLst/>
@@ -18173,7 +18173,7 @@
         <p:spPr>
           <a:xfrm>
             <a:off x="4709160" y="1828800"/>
-            <a:ext cx="4113000" cy="226800"/>
+            <a:ext cx="4112640" cy="226440"/>
           </a:xfrm>
           <a:prstGeom prst="rect">
             <a:avLst/>
@@ -18204,7 +18204,7 @@
         <p:spPr>
           <a:xfrm>
             <a:off x="4818960" y="1883520"/>
-            <a:ext cx="98640" cy="98640"/>
+            <a:ext cx="98280" cy="98280"/>
           </a:xfrm>
           <a:prstGeom prst="ellipse">
             <a:avLst/>
@@ -18235,7 +18235,7 @@
         <p:spPr>
           <a:xfrm>
             <a:off x="5001840" y="1883520"/>
-            <a:ext cx="98640" cy="98640"/>
+            <a:ext cx="98280" cy="98280"/>
           </a:xfrm>
           <a:prstGeom prst="ellipse">
             <a:avLst/>
@@ -18266,7 +18266,7 @@
         <p:spPr>
           <a:xfrm>
             <a:off x="5184720" y="1883520"/>
-            <a:ext cx="98640" cy="98640"/>
+            <a:ext cx="98280" cy="98280"/>
           </a:xfrm>
           <a:prstGeom prst="ellipse">
             <a:avLst/>
@@ -18297,7 +18297,7 @@
         <p:spPr>
           <a:xfrm>
             <a:off x="4818960" y="2084760"/>
-            <a:ext cx="3930120" cy="2302560"/>
+            <a:ext cx="3929760" cy="2302200"/>
           </a:xfrm>
           <a:prstGeom prst="rect">
             <a:avLst/>
@@ -18793,7 +18793,7 @@
         <p:spPr>
           <a:xfrm>
             <a:off x="0" y="0"/>
-            <a:ext cx="62280" cy="5141880"/>
+            <a:ext cx="61920" cy="5141520"/>
           </a:xfrm>
           <a:prstGeom prst="rect">
             <a:avLst/>
@@ -18824,7 +18824,7 @@
         <p:spPr>
           <a:xfrm>
             <a:off x="0" y="0"/>
-            <a:ext cx="9142200" cy="711360"/>
+            <a:ext cx="9141840" cy="711000"/>
           </a:xfrm>
           <a:prstGeom prst="rect">
             <a:avLst/>
@@ -18855,7 +18855,7 @@
         <p:spPr>
           <a:xfrm>
             <a:off x="182880" y="0"/>
-            <a:ext cx="7130520" cy="711360"/>
+            <a:ext cx="7130160" cy="711000"/>
           </a:xfrm>
           <a:prstGeom prst="rect">
             <a:avLst/>
@@ -18910,7 +18910,7 @@
         <p:spPr>
           <a:xfrm>
             <a:off x="7589520" y="109800"/>
-            <a:ext cx="1369800" cy="473760"/>
+            <a:ext cx="1369440" cy="473400"/>
           </a:xfrm>
           <a:prstGeom prst="rect">
             <a:avLst/>
@@ -18948,7 +18948,7 @@
         <p:spPr>
           <a:xfrm>
             <a:off x="7589520" y="109800"/>
-            <a:ext cx="1369800" cy="473760"/>
+            <a:ext cx="1369440" cy="473400"/>
           </a:xfrm>
           <a:prstGeom prst="rect">
             <a:avLst/>
@@ -20028,7 +20028,7 @@
         <p:spPr>
           <a:xfrm>
             <a:off x="182880" y="4462200"/>
-            <a:ext cx="4158720" cy="546840"/>
+            <a:ext cx="4158360" cy="546480"/>
           </a:xfrm>
           <a:prstGeom prst="rect">
             <a:avLst/>
@@ -20066,7 +20066,7 @@
         <p:spPr>
           <a:xfrm>
             <a:off x="320040" y="4526280"/>
-            <a:ext cx="3930120" cy="382320"/>
+            <a:ext cx="3929760" cy="381960"/>
           </a:xfrm>
           <a:prstGeom prst="rect">
             <a:avLst/>
@@ -20121,7 +20121,7 @@
         <p:spPr>
           <a:xfrm>
             <a:off x="4572000" y="4462200"/>
-            <a:ext cx="4387320" cy="546840"/>
+            <a:ext cx="4386960" cy="546480"/>
           </a:xfrm>
           <a:prstGeom prst="rect">
             <a:avLst/>
@@ -20159,7 +20159,7 @@
         <p:spPr>
           <a:xfrm>
             <a:off x="4709160" y="4526280"/>
-            <a:ext cx="4113000" cy="382320"/>
+            <a:ext cx="4112640" cy="381960"/>
           </a:xfrm>
           <a:prstGeom prst="rect">
             <a:avLst/>
@@ -20251,7 +20251,7 @@
         <p:spPr>
           <a:xfrm>
             <a:off x="0" y="0"/>
-            <a:ext cx="9142200" cy="5141880"/>
+            <a:ext cx="9141840" cy="5141520"/>
           </a:xfrm>
           <a:prstGeom prst="rect">
             <a:avLst/>
@@ -20284,7 +20284,7 @@
         <p:spPr>
           <a:xfrm>
             <a:off x="274320" y="457200"/>
-            <a:ext cx="2284200" cy="2741400"/>
+            <a:ext cx="2283840" cy="2741040"/>
           </a:xfrm>
           <a:prstGeom prst="rect">
             <a:avLst/>
@@ -20341,7 +20341,7 @@
         <p:spPr>
           <a:xfrm>
             <a:off x="1005840" y="1645920"/>
-            <a:ext cx="7130520" cy="52920"/>
+            <a:ext cx="7130160" cy="52560"/>
           </a:xfrm>
           <a:prstGeom prst="rect">
             <a:avLst/>
@@ -20372,7 +20372,7 @@
         <p:spPr>
           <a:xfrm>
             <a:off x="1005840" y="1783080"/>
-            <a:ext cx="7770600" cy="1369800"/>
+            <a:ext cx="7770240" cy="1369440"/>
           </a:xfrm>
           <a:prstGeom prst="rect">
             <a:avLst/>
@@ -20427,7 +20427,7 @@
         <p:spPr>
           <a:xfrm>
             <a:off x="1005840" y="3200400"/>
-            <a:ext cx="7770600" cy="821160"/>
+            <a:ext cx="7770240" cy="820800"/>
           </a:xfrm>
           <a:prstGeom prst="rect">
             <a:avLst/>
